--- a/cmcc_selection/slides/dr_filled.pptx
+++ b/cmcc_selection/slides/dr_filled.pptx
@@ -8,10 +8,9 @@
     <p:notesMasterId r:id="rId6"/>
   </p:notesMasterIdLst>
   <p:sldIdLst>
-    <p:sldId id="256" r:id="rId2"/>
-    <p:sldId id="269" r:id="rId3"/>
-    <p:sldId id="270" r:id="rId4"/>
-    <p:sldId id="274" r:id="rId5"/>
+    <p:sldId id="256" r:id="rId20"/>
+    <p:sldId id="257" r:id="rId3"/>
+    <p:sldId id="258" r:id="rId4"/>
   </p:sldIdLst>
   <p:sldSz cx="12192000" cy="6858000"/>
   <p:notesSz cx="6858000" cy="9144000"/>
@@ -884,132 +883,6 @@
 </p:notesMaster>
 </file>
 
-<file path=ppt/notesSlides/notesSlide1.xml><?xml version="1.0" encoding="utf-8"?>
-<p:notes xmlns:a="http://schemas.openxmlformats.org/drawingml/2006/main" xmlns:r="http://schemas.openxmlformats.org/officeDocument/2006/relationships" xmlns:p="http://schemas.openxmlformats.org/presentationml/2006/main" showMasterSp="0" showMasterPhAnim="0">
-  <p:cSld>
-    <p:spTree>
-      <p:nvGrpSpPr>
-        <p:cNvPr id="1" name="Shape 76"/>
-        <p:cNvGrpSpPr/>
-        <p:nvPr/>
-      </p:nvGrpSpPr>
-      <p:grpSpPr>
-        <a:xfrm>
-          <a:off x="0" y="0"/>
-          <a:ext cx="0" cy="0"/>
-          <a:chOff x="0" y="0"/>
-          <a:chExt cx="0" cy="0"/>
-        </a:xfrm>
-      </p:grpSpPr>
-      <p:sp>
-        <p:nvSpPr>
-          <p:cNvPr id="77" name="Google Shape;77;p4:notes"/>
-          <p:cNvSpPr>
-            <a:spLocks noGrp="1" noRot="1" noChangeAspect="1"/>
-          </p:cNvSpPr>
-          <p:nvPr>
-            <p:ph type="sldImg" idx="2"/>
-          </p:nvPr>
-        </p:nvSpPr>
-        <p:spPr>
-          <a:xfrm>
-            <a:off x="381000" y="685800"/>
-            <a:ext cx="6096000" cy="3429000"/>
-          </a:xfrm>
-          <a:custGeom>
-            <a:avLst/>
-            <a:gdLst/>
-            <a:ahLst/>
-            <a:cxnLst/>
-            <a:rect l="l" t="t" r="r" b="b"/>
-            <a:pathLst>
-              <a:path w="120000" h="120000" extrusionOk="0">
-                <a:moveTo>
-                  <a:pt x="0" y="0"/>
-                </a:moveTo>
-                <a:lnTo>
-                  <a:pt x="120000" y="0"/>
-                </a:lnTo>
-                <a:lnTo>
-                  <a:pt x="120000" y="120000"/>
-                </a:lnTo>
-                <a:lnTo>
-                  <a:pt x="0" y="120000"/>
-                </a:lnTo>
-                <a:close/>
-              </a:path>
-            </a:pathLst>
-          </a:custGeom>
-          <a:noFill/>
-          <a:ln w="9525" cap="flat" cmpd="sng">
-            <a:solidFill>
-              <a:srgbClr val="000000"/>
-            </a:solidFill>
-            <a:prstDash val="solid"/>
-            <a:round/>
-            <a:headEnd type="none" w="sm" len="sm"/>
-            <a:tailEnd type="none" w="sm" len="sm"/>
-          </a:ln>
-        </p:spPr>
-      </p:sp>
-      <p:sp>
-        <p:nvSpPr>
-          <p:cNvPr id="78" name="Google Shape;78;p4:notes"/>
-          <p:cNvSpPr txBox="1">
-            <a:spLocks noGrp="1"/>
-          </p:cNvSpPr>
-          <p:nvPr>
-            <p:ph type="body" idx="1"/>
-          </p:nvPr>
-        </p:nvSpPr>
-        <p:spPr>
-          <a:xfrm>
-            <a:off x="685800" y="4343400"/>
-            <a:ext cx="5486400" cy="4114800"/>
-          </a:xfrm>
-          <a:prstGeom prst="rect">
-            <a:avLst/>
-          </a:prstGeom>
-          <a:noFill/>
-          <a:ln>
-            <a:noFill/>
-          </a:ln>
-        </p:spPr>
-        <p:txBody>
-          <a:bodyPr spcFirstLastPara="1" wrap="square" lIns="91425" tIns="91425" rIns="91425" bIns="91425" anchor="t" anchorCtr="0">
-            <a:noAutofit/>
-          </a:bodyPr>
-          <a:lstStyle/>
-          <a:p>
-            <a:pPr marL="457200" marR="0" lvl="0" indent="-228600" algn="l" rtl="0">
-              <a:lnSpc>
-                <a:spcPct val="100000"/>
-              </a:lnSpc>
-              <a:spcBef>
-                <a:spcPts val="0"/>
-              </a:spcBef>
-              <a:spcAft>
-                <a:spcPts val="0"/>
-              </a:spcAft>
-              <a:buClr>
-                <a:srgbClr val="000000"/>
-              </a:buClr>
-              <a:buSzPts val="1100"/>
-              <a:buFont typeface="Arial"/>
-              <a:buNone/>
-            </a:pPr>
-            <a:endParaRPr/>
-          </a:p>
-        </p:txBody>
-      </p:sp>
-    </p:spTree>
-  </p:cSld>
-  <p:clrMapOvr>
-    <a:masterClrMapping/>
-  </p:clrMapOvr>
-</p:notes>
-</file>
-
 <file path=ppt/notesSlides/notesSlide2.xml><?xml version="1.0" encoding="utf-8"?>
 <p:notes xmlns:a="http://schemas.openxmlformats.org/drawingml/2006/main" xmlns:r="http://schemas.openxmlformats.org/officeDocument/2006/relationships" xmlns:p="http://schemas.openxmlformats.org/presentationml/2006/main" showMasterSp="0" showMasterPhAnim="0">
   <p:cSld>
@@ -1061,7 +934,7 @@
             </a:pPr>
             <a:r>
               <a:rPr lang="en-GB" sz="1200"/>
-              <a:t>Starting point is our internal selection of AR7 fast-track opportunities: 30 opportunities marked High or Medium by four Divisions, which expand to 117 variable-group references. We take every variable of every listed group - no per-variable filtering - and expand them against the official Data Request v1.2.2.4 with the data_request_api. Two release versions are involved: the selection was written against DR v1.2.2.2, we expand on v1.2.2.4, and two groups were renamed in between - omip_geometry_physics is now omip_scalars_high_priority, hydro_modelling_PET_daily is now WaterResourcesPET_daily - so they are re-pointed by name. Coverage is then checked group by group: of 118 parsed tokens, 115 match the DR directly, 2 are the renamed ones, 1 is a free-text fragment from the spreadsheet (the word 'not' in the Ocean Extremes cell) and is discarded, and none is left unresolved. Had one been unresolved the script exits non-zero, so the pipeline cannot silently produce a shorter list. That gives 853 requests, i.e. 660 distinct CMOR variables across frequencies. Against the CMCC-ESM3 output we then have 436 already producible, 67 derivable from fields we already store, and 350 true gaps - concentrated in aerosol and atmospheric chemistry, land carbon and ocean biogeochemistry.</a:t>
+              <a:t>Starting point is our internal selection of AR7 fast-track opportunities: 30 opportunities marked High or Medium by four Divisions, which expand to 117 variable-group references. We take every variable of every listed group - no per-variable filtering - and expand them against the official Data Request v1.2.2.4 with the data_request_api. Two release versions are involved: the selection was written against DR v1.2.2.2, we expand on v1.2.2.4, and two groups were renamed in between - omip_geometry_physics is now omip_scalars_high_priority, hydro_modelling_PET_daily is now WaterResourcesPET_daily - so they are re-pointed by name. Coverage is then checked group by group: of 118 parsed tokens, 115 match the DR directly, 2 are the renamed ones, 1 is a free-text fragment from the spreadsheet (the word 'not' in the Ocean Extremes cell) and is discarded, and none is left unresolved. Had one been unresolved the script exits non-zero, so the pipeline cannot silently produce a shorter list. That gives 853 requests, i.e. 660 distinct CMOR variables across frequencies. Against the CMCC-ESM3 output we then have 436 already producible, 67 derivable from fields we already store, and 350 new CMIP7 variables - requested but not produced today, concentrated in aerosol and atmospheric chemistry, land carbon and ocean biogeochemistry.</a:t>
             </a:r>
           </a:p>
         </p:txBody>
@@ -1176,7 +1049,7 @@
             </a:pPr>
             <a:r>
               <a:rPr lang="en-GB" sz="1200"/>
-              <a:t>Volumes are per simulated model-year on the CMCC-ESM3 grid, uncompressed. We produce about 213 GB per model-year today, roughly twice a CMIP6 model-year; the full request would be 437 GB, about 4.4 times CMIP6. Derivable variables add nothing because they are slices of stored fields. The cost is extremely concentrated: 174 of the 224 GB gap is ocean 3-hourly, and two fields - ficeberg and hfrunoffds - are 76 % of it. So the decision to take is about ocean sub-daily 3-D output, not about 350 variables. The estimate is calibrated on a real B1850 run and validated against its files. Remaining gaps are tracked as open rows in the lookup tables that map CMOR names to raw model fields.</a:t>
+              <a:t>Volumes are per simulated model-year on the CMCC-ESM3 grid, uncompressed. We produce about 213 GB per model-year today, roughly twice a CMIP6 model-year; the full request would be 437 GB, about 4.4 times CMIP6. Derivable variables add nothing because they are slices of stored fields. Over the fast-track plan of roughly 2500 model-years that is about half a petabyte for what we produce today and just over one petabyte for the full request, halved again if the archive is deflated. The cost is extremely concentrated: 174 of the 224 GB of new variables is ocean 3-hourly, and two fields - ficeberg and hfrunoffds - are 76 % of it. So the decision to take is about ocean sub-daily 3-D output, not about 350 variables. The estimate is calibrated on a real B1850 run and validated against its files. The new variables are tracked as open rows in the lookup tables that map CMOR names to raw model fields.</a:t>
             </a:r>
           </a:p>
         </p:txBody>
@@ -1184,128 +1057,6 @@
       <p:sp>
         <p:nvSpPr>
           <p:cNvPr id="252" name="Google Shape;252;g3fb51410e66_1_220:notes"/>
-          <p:cNvSpPr>
-            <a:spLocks noGrp="1" noRot="1" noChangeAspect="1"/>
-          </p:cNvSpPr>
-          <p:nvPr>
-            <p:ph type="sldImg" idx="2"/>
-          </p:nvPr>
-        </p:nvSpPr>
-        <p:spPr>
-          <a:xfrm>
-            <a:off x="381000" y="685800"/>
-            <a:ext cx="6096000" cy="3429000"/>
-          </a:xfrm>
-          <a:custGeom>
-            <a:avLst/>
-            <a:gdLst/>
-            <a:ahLst/>
-            <a:cxnLst/>
-            <a:rect l="l" t="t" r="r" b="b"/>
-            <a:pathLst>
-              <a:path w="120000" h="120000" extrusionOk="0">
-                <a:moveTo>
-                  <a:pt x="0" y="0"/>
-                </a:moveTo>
-                <a:lnTo>
-                  <a:pt x="120000" y="0"/>
-                </a:lnTo>
-                <a:lnTo>
-                  <a:pt x="120000" y="120000"/>
-                </a:lnTo>
-                <a:lnTo>
-                  <a:pt x="0" y="120000"/>
-                </a:lnTo>
-                <a:close/>
-              </a:path>
-            </a:pathLst>
-          </a:custGeom>
-          <a:noFill/>
-          <a:ln w="9525" cap="flat" cmpd="sng">
-            <a:solidFill>
-              <a:srgbClr val="000000"/>
-            </a:solidFill>
-            <a:prstDash val="solid"/>
-            <a:round/>
-            <a:headEnd type="none" w="sm" len="sm"/>
-            <a:tailEnd type="none" w="sm" len="sm"/>
-          </a:ln>
-        </p:spPr>
-      </p:sp>
-    </p:spTree>
-  </p:cSld>
-  <p:clrMapOvr>
-    <a:masterClrMapping/>
-  </p:clrMapOvr>
-</p:notes>
-</file>
-
-<file path=ppt/notesSlides/notesSlide4.xml><?xml version="1.0" encoding="utf-8"?>
-<p:notes xmlns:a="http://schemas.openxmlformats.org/drawingml/2006/main" xmlns:r="http://schemas.openxmlformats.org/officeDocument/2006/relationships" xmlns:p="http://schemas.openxmlformats.org/presentationml/2006/main" showMasterSp="0" showMasterPhAnim="0">
-  <p:cSld>
-    <p:spTree>
-      <p:nvGrpSpPr>
-        <p:cNvPr id="1" name="Shape 290"/>
-        <p:cNvGrpSpPr/>
-        <p:nvPr/>
-      </p:nvGrpSpPr>
-      <p:grpSpPr>
-        <a:xfrm>
-          <a:off x="0" y="0"/>
-          <a:ext cx="0" cy="0"/>
-          <a:chOff x="0" y="0"/>
-          <a:chExt cx="0" cy="0"/>
-        </a:xfrm>
-      </p:grpSpPr>
-      <p:sp>
-        <p:nvSpPr>
-          <p:cNvPr id="291" name="Google Shape;291;p81:notes"/>
-          <p:cNvSpPr txBox="1">
-            <a:spLocks noGrp="1"/>
-          </p:cNvSpPr>
-          <p:nvPr>
-            <p:ph type="body" idx="1"/>
-          </p:nvPr>
-        </p:nvSpPr>
-        <p:spPr>
-          <a:xfrm>
-            <a:off x="685800" y="4343400"/>
-            <a:ext cx="5486400" cy="4114800"/>
-          </a:xfrm>
-          <a:prstGeom prst="rect">
-            <a:avLst/>
-          </a:prstGeom>
-          <a:noFill/>
-          <a:ln>
-            <a:noFill/>
-          </a:ln>
-        </p:spPr>
-        <p:txBody>
-          <a:bodyPr spcFirstLastPara="1" wrap="square" lIns="91425" tIns="91425" rIns="91425" bIns="91425" anchor="t" anchorCtr="0">
-            <a:noAutofit/>
-          </a:bodyPr>
-          <a:lstStyle/>
-          <a:p>
-            <a:pPr marL="0" lvl="0" indent="0" algn="l" rtl="0">
-              <a:lnSpc>
-                <a:spcPct val="100000"/>
-              </a:lnSpc>
-              <a:spcBef>
-                <a:spcPts val="0"/>
-              </a:spcBef>
-              <a:spcAft>
-                <a:spcPts val="0"/>
-              </a:spcAft>
-              <a:buSzPts val="1100"/>
-              <a:buNone/>
-            </a:pPr>
-            <a:endParaRPr/>
-          </a:p>
-        </p:txBody>
-      </p:sp>
-      <p:sp>
-        <p:nvSpPr>
-          <p:cNvPr id="292" name="Google Shape;292;p81:notes"/>
           <p:cNvSpPr>
             <a:spLocks noGrp="1" noRot="1" noChangeAspect="1"/>
           </p:cNvSpPr>
@@ -13532,514 +13283,6 @@
 </p:sldMaster>
 </file>
 
-<file path=ppt/slides/slide1.xml><?xml version="1.0" encoding="utf-8"?>
-<p:sld xmlns:a="http://schemas.openxmlformats.org/drawingml/2006/main" xmlns:r="http://schemas.openxmlformats.org/officeDocument/2006/relationships" xmlns:p="http://schemas.openxmlformats.org/presentationml/2006/main">
-  <p:cSld>
-    <p:spTree>
-      <p:nvGrpSpPr>
-        <p:cNvPr id="1" name="Shape 79"/>
-        <p:cNvGrpSpPr/>
-        <p:nvPr/>
-      </p:nvGrpSpPr>
-      <p:grpSpPr>
-        <a:xfrm>
-          <a:off x="0" y="0"/>
-          <a:ext cx="0" cy="0"/>
-          <a:chOff x="0" y="0"/>
-          <a:chExt cx="0" cy="0"/>
-        </a:xfrm>
-      </p:grpSpPr>
-      <p:sp>
-        <p:nvSpPr>
-          <p:cNvPr id="80" name="Google Shape;80;p12"/>
-          <p:cNvSpPr txBox="1">
-            <a:spLocks noGrp="1"/>
-          </p:cNvSpPr>
-          <p:nvPr>
-            <p:ph type="body" idx="3"/>
-          </p:nvPr>
-        </p:nvSpPr>
-        <p:spPr>
-          <a:xfrm>
-            <a:off x="594733" y="2656167"/>
-            <a:ext cx="4634868" cy="369600"/>
-          </a:xfrm>
-          <a:prstGeom prst="rect">
-            <a:avLst/>
-          </a:prstGeom>
-          <a:noFill/>
-          <a:ln>
-            <a:noFill/>
-          </a:ln>
-        </p:spPr>
-        <p:txBody>
-          <a:bodyPr spcFirstLastPara="1" wrap="square" lIns="91425" tIns="45700" rIns="91425" bIns="45700" anchor="b" anchorCtr="0">
-            <a:noAutofit/>
-          </a:bodyPr>
-          <a:lstStyle/>
-          <a:p>
-            <a:pPr marL="457200" lvl="0" indent="-228600" algn="l" rtl="0">
-              <a:lnSpc>
-                <a:spcPct val="90000"/>
-              </a:lnSpc>
-              <a:spcBef>
-                <a:spcPts val="1000"/>
-              </a:spcBef>
-              <a:spcAft>
-                <a:spcPts val="0"/>
-              </a:spcAft>
-              <a:buSzPts val="2800"/>
-              <a:buNone/>
-            </a:pPr>
-            <a:endParaRPr/>
-          </a:p>
-        </p:txBody>
-      </p:sp>
-      <p:sp>
-        <p:nvSpPr>
-          <p:cNvPr id="81" name="Google Shape;81;p12"/>
-          <p:cNvSpPr txBox="1">
-            <a:spLocks noGrp="1"/>
-          </p:cNvSpPr>
-          <p:nvPr>
-            <p:ph type="body" idx="1"/>
-          </p:nvPr>
-        </p:nvSpPr>
-        <p:spPr>
-          <a:xfrm>
-            <a:off x="594733" y="3072977"/>
-            <a:ext cx="4631139" cy="3196800"/>
-          </a:xfrm>
-          <a:prstGeom prst="rect">
-            <a:avLst/>
-          </a:prstGeom>
-          <a:noFill/>
-          <a:ln>
-            <a:noFill/>
-          </a:ln>
-        </p:spPr>
-        <p:txBody>
-          <a:bodyPr spcFirstLastPara="1" wrap="square" lIns="91425" tIns="45700" rIns="91425" bIns="45700" anchor="t" anchorCtr="0">
-            <a:noAutofit/>
-          </a:bodyPr>
-          <a:lstStyle/>
-          <a:p>
-            <a:pPr marL="457200" lvl="0" indent="-228600" algn="l" rtl="0">
-              <a:lnSpc>
-                <a:spcPct val="90000"/>
-              </a:lnSpc>
-              <a:spcBef>
-                <a:spcPts val="400"/>
-              </a:spcBef>
-              <a:spcAft>
-                <a:spcPts val="0"/>
-              </a:spcAft>
-              <a:buSzPts val="2800"/>
-              <a:buNone/>
-            </a:pPr>
-            <a:endParaRPr/>
-          </a:p>
-        </p:txBody>
-      </p:sp>
-      <p:sp>
-        <p:nvSpPr>
-          <p:cNvPr id="82" name="Google Shape;82;p12"/>
-          <p:cNvSpPr txBox="1">
-            <a:spLocks noGrp="1"/>
-          </p:cNvSpPr>
-          <p:nvPr>
-            <p:ph type="title"/>
-          </p:nvPr>
-        </p:nvSpPr>
-        <p:spPr>
-          <a:xfrm>
-            <a:off x="599016" y="575019"/>
-            <a:ext cx="4876800" cy="1325563"/>
-          </a:xfrm>
-          <a:prstGeom prst="rect">
-            <a:avLst/>
-          </a:prstGeom>
-          <a:noFill/>
-          <a:ln>
-            <a:noFill/>
-          </a:ln>
-        </p:spPr>
-        <p:txBody>
-          <a:bodyPr spcFirstLastPara="1" wrap="square" lIns="91425" tIns="45700" rIns="91425" bIns="45700" anchor="t" anchorCtr="0">
-            <a:noAutofit/>
-          </a:bodyPr>
-          <a:lstStyle/>
-          <a:p>
-            <a:pPr marL="0" lvl="0" indent="0" algn="l" rtl="0">
-              <a:lnSpc>
-                <a:spcPct val="90000"/>
-              </a:lnSpc>
-              <a:spcBef>
-                <a:spcPts val="0"/>
-              </a:spcBef>
-              <a:spcAft>
-                <a:spcPts val="0"/>
-              </a:spcAft>
-              <a:buSzPts val="4400"/>
-              <a:buNone/>
-            </a:pPr>
-            <a:endParaRPr/>
-          </a:p>
-        </p:txBody>
-      </p:sp>
-      <p:pic>
-        <p:nvPicPr>
-          <p:cNvPr id="83" name="Google Shape;83;p12" descr="Immagine che contiene Terra, pianeta, Spazio esterno, Oggetto astronomico  Descrizione generata automaticamente"/>
-          <p:cNvPicPr preferRelativeResize="0"/>
-          <p:nvPr/>
-        </p:nvPicPr>
-        <p:blipFill rotWithShape="1">
-          <a:blip r:embed="rId3">
-            <a:alphaModFix/>
-          </a:blip>
-          <a:srcRect/>
-          <a:stretch/>
-        </p:blipFill>
-        <p:spPr>
-          <a:xfrm>
-            <a:off x="-1" y="0"/>
-            <a:ext cx="12213931" cy="6858000"/>
-          </a:xfrm>
-          <a:prstGeom prst="rect">
-            <a:avLst/>
-          </a:prstGeom>
-          <a:noFill/>
-          <a:ln>
-            <a:noFill/>
-          </a:ln>
-        </p:spPr>
-      </p:pic>
-      <p:pic>
-        <p:nvPicPr>
-          <p:cNvPr id="84" name="Google Shape;84;p12"/>
-          <p:cNvPicPr preferRelativeResize="0"/>
-          <p:nvPr/>
-        </p:nvPicPr>
-        <p:blipFill rotWithShape="1">
-          <a:blip r:embed="rId4">
-            <a:alphaModFix/>
-          </a:blip>
-          <a:srcRect l="23220" t="31843" r="21467" b="39024"/>
-          <a:stretch/>
-        </p:blipFill>
-        <p:spPr>
-          <a:xfrm>
-            <a:off x="859924" y="759802"/>
-            <a:ext cx="3633251" cy="1325551"/>
-          </a:xfrm>
-          <a:prstGeom prst="rect">
-            <a:avLst/>
-          </a:prstGeom>
-          <a:noFill/>
-          <a:ln>
-            <a:noFill/>
-          </a:ln>
-        </p:spPr>
-      </p:pic>
-      <p:sp>
-        <p:nvSpPr>
-          <p:cNvPr id="85" name="Google Shape;85;p12"/>
-          <p:cNvSpPr txBox="1"/>
-          <p:nvPr/>
-        </p:nvSpPr>
-        <p:spPr>
-          <a:xfrm>
-            <a:off x="96000" y="2518500"/>
-            <a:ext cx="9857700" cy="1477500"/>
-          </a:xfrm>
-          <a:prstGeom prst="rect">
-            <a:avLst/>
-          </a:prstGeom>
-          <a:noFill/>
-          <a:ln>
-            <a:noFill/>
-          </a:ln>
-        </p:spPr>
-        <p:txBody>
-          <a:bodyPr spcFirstLastPara="1" wrap="square" lIns="91425" tIns="45700" rIns="91425" bIns="45700" anchor="t" anchorCtr="0">
-            <a:spAutoFit/>
-          </a:bodyPr>
-          <a:lstStyle/>
-          <a:p>
-            <a:pPr marL="875664" marR="0" lvl="0" indent="0" algn="l" rtl="0">
-              <a:lnSpc>
-                <a:spcPct val="100000"/>
-              </a:lnSpc>
-              <a:spcBef>
-                <a:spcPts val="0"/>
-              </a:spcBef>
-              <a:spcAft>
-                <a:spcPts val="0"/>
-              </a:spcAft>
-              <a:buClr>
-                <a:srgbClr val="000000"/>
-              </a:buClr>
-              <a:buSzPts val="4500"/>
-              <a:buFont typeface="Arial"/>
-              <a:buNone/>
-            </a:pPr>
-            <a:r>
-              <a:rPr lang="it-IT" sz="4500" b="1">
-                <a:solidFill>
-                  <a:srgbClr val="FFFFFF"/>
-                </a:solidFill>
-                <a:latin typeface="Roboto"/>
-                <a:ea typeface="Roboto"/>
-                <a:cs typeface="Roboto"/>
-                <a:sym typeface="Roboto"/>
-              </a:rPr>
-              <a:t>CMCC/NorESM collaboration CMCC-ESM3 development update</a:t>
-            </a:r>
-            <a:endParaRPr sz="4500" b="1" i="0" u="none" strike="noStrike" cap="none">
-              <a:solidFill>
-                <a:srgbClr val="FFFFFF"/>
-              </a:solidFill>
-              <a:latin typeface="Roboto"/>
-              <a:ea typeface="Roboto"/>
-              <a:cs typeface="Roboto"/>
-              <a:sym typeface="Roboto"/>
-            </a:endParaRPr>
-          </a:p>
-        </p:txBody>
-      </p:sp>
-      <p:sp>
-        <p:nvSpPr>
-          <p:cNvPr id="86" name="Google Shape;86;p12"/>
-          <p:cNvSpPr txBox="1"/>
-          <p:nvPr/>
-        </p:nvSpPr>
-        <p:spPr>
-          <a:xfrm>
-            <a:off x="125683" y="5928664"/>
-            <a:ext cx="2611579" cy="400110"/>
-          </a:xfrm>
-          <a:prstGeom prst="rect">
-            <a:avLst/>
-          </a:prstGeom>
-          <a:noFill/>
-          <a:ln>
-            <a:noFill/>
-          </a:ln>
-        </p:spPr>
-        <p:txBody>
-          <a:bodyPr spcFirstLastPara="1" wrap="square" lIns="91425" tIns="45700" rIns="91425" bIns="45700" anchor="t" anchorCtr="0">
-            <a:spAutoFit/>
-          </a:bodyPr>
-          <a:lstStyle/>
-          <a:p>
-            <a:pPr marL="875664" marR="0" lvl="0" indent="0" algn="l" rtl="0">
-              <a:lnSpc>
-                <a:spcPct val="100000"/>
-              </a:lnSpc>
-              <a:spcBef>
-                <a:spcPts val="0"/>
-              </a:spcBef>
-              <a:spcAft>
-                <a:spcPts val="0"/>
-              </a:spcAft>
-              <a:buClr>
-                <a:srgbClr val="000000"/>
-              </a:buClr>
-              <a:buSzPts val="2000"/>
-              <a:buFont typeface="Arial"/>
-              <a:buNone/>
-            </a:pPr>
-            <a:r>
-              <a:rPr lang="it-IT" sz="2000" b="1" i="0" u="none" strike="noStrike" cap="none">
-                <a:solidFill>
-                  <a:srgbClr val="FFFFFF"/>
-                </a:solidFill>
-                <a:latin typeface="Roboto"/>
-                <a:ea typeface="Roboto"/>
-                <a:cs typeface="Roboto"/>
-                <a:sym typeface="Roboto"/>
-              </a:rPr>
-              <a:t>www.cmcc.it</a:t>
-            </a:r>
-            <a:endParaRPr sz="2000" b="1" i="0" u="none" strike="noStrike" cap="none">
-              <a:solidFill>
-                <a:srgbClr val="000000"/>
-              </a:solidFill>
-              <a:latin typeface="Roboto"/>
-              <a:ea typeface="Roboto"/>
-              <a:cs typeface="Roboto"/>
-              <a:sym typeface="Roboto"/>
-            </a:endParaRPr>
-          </a:p>
-        </p:txBody>
-      </p:sp>
-      <p:pic>
-        <p:nvPicPr>
-          <p:cNvPr id="87" name="Google Shape;87;p12"/>
-          <p:cNvPicPr preferRelativeResize="0"/>
-          <p:nvPr/>
-        </p:nvPicPr>
-        <p:blipFill rotWithShape="1">
-          <a:blip r:embed="rId5">
-            <a:alphaModFix/>
-          </a:blip>
-          <a:srcRect/>
-          <a:stretch/>
-        </p:blipFill>
-        <p:spPr>
-          <a:xfrm>
-            <a:off x="10500811" y="5908084"/>
-            <a:ext cx="1047472" cy="501210"/>
-          </a:xfrm>
-          <a:prstGeom prst="rect">
-            <a:avLst/>
-          </a:prstGeom>
-          <a:noFill/>
-          <a:ln>
-            <a:noFill/>
-          </a:ln>
-        </p:spPr>
-      </p:pic>
-      <p:sp>
-        <p:nvSpPr>
-          <p:cNvPr id="88" name="Google Shape;88;p12"/>
-          <p:cNvSpPr txBox="1"/>
-          <p:nvPr/>
-        </p:nvSpPr>
-        <p:spPr>
-          <a:xfrm>
-            <a:off x="599023" y="4210972"/>
-            <a:ext cx="6581400" cy="492600"/>
-          </a:xfrm>
-          <a:prstGeom prst="rect">
-            <a:avLst/>
-          </a:prstGeom>
-          <a:noFill/>
-          <a:ln>
-            <a:noFill/>
-          </a:ln>
-        </p:spPr>
-        <p:txBody>
-          <a:bodyPr spcFirstLastPara="1" wrap="square" lIns="91425" tIns="45700" rIns="91425" bIns="45700" anchor="t" anchorCtr="0">
-            <a:spAutoFit/>
-          </a:bodyPr>
-          <a:lstStyle/>
-          <a:p>
-            <a:pPr marL="0" marR="0" lvl="0" indent="0" algn="l" rtl="0">
-              <a:lnSpc>
-                <a:spcPct val="100000"/>
-              </a:lnSpc>
-              <a:spcBef>
-                <a:spcPts val="0"/>
-              </a:spcBef>
-              <a:spcAft>
-                <a:spcPts val="0"/>
-              </a:spcAft>
-              <a:buClr>
-                <a:srgbClr val="000000"/>
-              </a:buClr>
-              <a:buSzPts val="4500"/>
-              <a:buFont typeface="Arial"/>
-              <a:buNone/>
-            </a:pPr>
-            <a:r>
-              <a:rPr lang="it-IT" sz="2600">
-                <a:solidFill>
-                  <a:srgbClr val="FFFFFF"/>
-                </a:solidFill>
-                <a:latin typeface="Roboto"/>
-                <a:ea typeface="Roboto"/>
-                <a:cs typeface="Roboto"/>
-                <a:sym typeface="Roboto"/>
-              </a:rPr>
-              <a:t>Silvio Gualdi on behalf of CMCC ESM Team</a:t>
-            </a:r>
-            <a:endParaRPr sz="2600" i="0" u="none" strike="noStrike" cap="none">
-              <a:solidFill>
-                <a:srgbClr val="FFFFFF"/>
-              </a:solidFill>
-              <a:latin typeface="Roboto"/>
-              <a:ea typeface="Roboto"/>
-              <a:cs typeface="Roboto"/>
-              <a:sym typeface="Roboto"/>
-            </a:endParaRPr>
-          </a:p>
-        </p:txBody>
-      </p:sp>
-      <p:sp>
-        <p:nvSpPr>
-          <p:cNvPr id="89" name="Google Shape;89;p12"/>
-          <p:cNvSpPr txBox="1"/>
-          <p:nvPr/>
-        </p:nvSpPr>
-        <p:spPr>
-          <a:xfrm>
-            <a:off x="8177749" y="5201800"/>
-            <a:ext cx="3633300" cy="523200"/>
-          </a:xfrm>
-          <a:prstGeom prst="rect">
-            <a:avLst/>
-          </a:prstGeom>
-          <a:noFill/>
-          <a:ln>
-            <a:noFill/>
-          </a:ln>
-        </p:spPr>
-        <p:txBody>
-          <a:bodyPr spcFirstLastPara="1" wrap="square" lIns="91425" tIns="45700" rIns="91425" bIns="45700" anchor="t" anchorCtr="0">
-            <a:spAutoFit/>
-          </a:bodyPr>
-          <a:lstStyle/>
-          <a:p>
-            <a:pPr marL="0" marR="0" lvl="0" indent="0" algn="ctr" rtl="0">
-              <a:lnSpc>
-                <a:spcPct val="100000"/>
-              </a:lnSpc>
-              <a:spcBef>
-                <a:spcPts val="0"/>
-              </a:spcBef>
-              <a:spcAft>
-                <a:spcPts val="0"/>
-              </a:spcAft>
-              <a:buClr>
-                <a:srgbClr val="000000"/>
-              </a:buClr>
-              <a:buSzPts val="4500"/>
-              <a:buFont typeface="Arial"/>
-              <a:buNone/>
-            </a:pPr>
-            <a:r>
-              <a:rPr lang="it-IT" sz="2800" b="1">
-                <a:solidFill>
-                  <a:srgbClr val="FFFFFF"/>
-                </a:solidFill>
-                <a:latin typeface="Roboto"/>
-                <a:ea typeface="Roboto"/>
-                <a:cs typeface="Roboto"/>
-                <a:sym typeface="Roboto"/>
-              </a:rPr>
-              <a:t>online 18-09-2026</a:t>
-            </a:r>
-            <a:endParaRPr sz="2800" b="1" i="0" u="none" strike="noStrike" cap="none">
-              <a:solidFill>
-                <a:srgbClr val="FFFFFF"/>
-              </a:solidFill>
-              <a:latin typeface="Roboto"/>
-              <a:ea typeface="Roboto"/>
-              <a:cs typeface="Roboto"/>
-              <a:sym typeface="Roboto"/>
-            </a:endParaRPr>
-          </a:p>
-        </p:txBody>
-      </p:sp>
-    </p:spTree>
-  </p:cSld>
-  <p:clrMapOvr>
-    <a:masterClrMapping/>
-  </p:clrMapOvr>
-</p:sld>
-</file>
-
 <file path=ppt/slides/slide2.xml><?xml version="1.0" encoding="utf-8"?>
 <p:sld xmlns:a="http://schemas.openxmlformats.org/drawingml/2006/main" xmlns:r="http://schemas.openxmlformats.org/officeDocument/2006/relationships" xmlns:p="http://schemas.openxmlformats.org/presentationml/2006/main">
   <p:cSld>
@@ -14136,7 +13379,7 @@
                 <a:cs typeface="Montserrat"/>
                 <a:sym typeface="Montserrat"/>
               </a:rPr>
-              <a:t>CMCC AR7-FT Data Request (1)</a:t>
+              <a:t>CMCC AR7-FT Data Request (2)</a:t>
             </a:r>
             <a:endParaRPr sz="3200" b="0" i="0" u="none" strike="noStrike" cap="none">
               <a:solidFill>
@@ -14291,7 +13534,7 @@
       </p:pic>
       <p:sp>
         <p:nvSpPr>
-          <p:cNvPr id="901" name="tb902"/>
+          <p:cNvPr id="929" name="tb930"/>
           <p:cNvSpPr txBox="1"/>
           <p:nvPr/>
         </p:nvSpPr>
@@ -14343,7 +13586,7 @@
       </p:sp>
       <p:sp>
         <p:nvSpPr>
-          <p:cNvPr id="903" name="rc904"/>
+          <p:cNvPr id="931" name="rc932"/>
           <p:cNvSpPr/>
           <p:nvPr/>
         </p:nvSpPr>
@@ -14376,7 +13619,7 @@
       </p:sp>
       <p:sp>
         <p:nvSpPr>
-          <p:cNvPr id="905" name="tb906"/>
+          <p:cNvPr id="933" name="tb934"/>
           <p:cNvSpPr txBox="1"/>
           <p:nvPr/>
         </p:nvSpPr>
@@ -14454,7 +13697,7 @@
       </p:sp>
       <p:sp>
         <p:nvSpPr>
-          <p:cNvPr id="907" name="rc908"/>
+          <p:cNvPr id="935" name="rc936"/>
           <p:cNvSpPr/>
           <p:nvPr/>
         </p:nvSpPr>
@@ -14487,7 +13730,7 @@
       </p:sp>
       <p:sp>
         <p:nvSpPr>
-          <p:cNvPr id="909" name="tb910"/>
+          <p:cNvPr id="937" name="tb938"/>
           <p:cNvSpPr txBox="1"/>
           <p:nvPr/>
         </p:nvSpPr>
@@ -14565,7 +13808,7 @@
       </p:sp>
       <p:sp>
         <p:nvSpPr>
-          <p:cNvPr id="911" name="rc912"/>
+          <p:cNvPr id="939" name="rc940"/>
           <p:cNvSpPr/>
           <p:nvPr/>
         </p:nvSpPr>
@@ -14598,7 +13841,7 @@
       </p:sp>
       <p:sp>
         <p:nvSpPr>
-          <p:cNvPr id="913" name="tb914"/>
+          <p:cNvPr id="941" name="tb942"/>
           <p:cNvSpPr txBox="1"/>
           <p:nvPr/>
         </p:nvSpPr>
@@ -14676,7 +13919,7 @@
       </p:sp>
       <p:sp>
         <p:nvSpPr>
-          <p:cNvPr id="915" name="tb916"/>
+          <p:cNvPr id="943" name="tb944"/>
           <p:cNvSpPr txBox="1"/>
           <p:nvPr/>
         </p:nvSpPr>
@@ -14728,7 +13971,7 @@
       </p:sp>
       <p:sp>
         <p:nvSpPr>
-          <p:cNvPr id="917" name="tb918"/>
+          <p:cNvPr id="945" name="tb946"/>
           <p:cNvSpPr txBox="1"/>
           <p:nvPr/>
         </p:nvSpPr>
@@ -14844,7 +14087,7 @@
       </p:sp>
       <p:sp>
         <p:nvSpPr>
-          <p:cNvPr id="919" name="tb920"/>
+          <p:cNvPr id="947" name="tb948"/>
           <p:cNvSpPr txBox="1"/>
           <p:nvPr/>
         </p:nvSpPr>
@@ -14896,7 +14139,7 @@
       </p:sp>
       <p:sp>
         <p:nvSpPr>
-          <p:cNvPr id="921" name="tb922"/>
+          <p:cNvPr id="949" name="tb950"/>
           <p:cNvSpPr txBox="1"/>
           <p:nvPr/>
         </p:nvSpPr>
@@ -14982,7 +14225,7 @@
       </p:sp>
       <p:sp>
         <p:nvSpPr>
-          <p:cNvPr id="923" name="tb924"/>
+          <p:cNvPr id="951" name="tb952"/>
           <p:cNvSpPr txBox="1"/>
           <p:nvPr/>
         </p:nvSpPr>
@@ -15034,7 +14277,7 @@
       </p:sp>
       <p:sp>
         <p:nvSpPr>
-          <p:cNvPr id="925" name="rc926"/>
+          <p:cNvPr id="953" name="rc954"/>
           <p:cNvSpPr/>
           <p:nvPr/>
         </p:nvSpPr>
@@ -15065,7 +14308,7 @@
       </p:sp>
       <p:sp>
         <p:nvSpPr>
-          <p:cNvPr id="927" name="rc928"/>
+          <p:cNvPr id="955" name="rc956"/>
           <p:cNvSpPr/>
           <p:nvPr/>
         </p:nvSpPr>
@@ -15096,7 +14339,7 @@
       </p:sp>
       <p:sp>
         <p:nvSpPr>
-          <p:cNvPr id="929" name="rc930"/>
+          <p:cNvPr id="957" name="rc958"/>
           <p:cNvSpPr/>
           <p:nvPr/>
         </p:nvSpPr>
@@ -15127,7 +14370,7 @@
       </p:sp>
       <p:sp>
         <p:nvSpPr>
-          <p:cNvPr id="931" name="rc932"/>
+          <p:cNvPr id="959" name="rc960"/>
           <p:cNvSpPr/>
           <p:nvPr/>
         </p:nvSpPr>
@@ -15158,7 +14401,7 @@
       </p:sp>
       <p:sp>
         <p:nvSpPr>
-          <p:cNvPr id="933" name="tb934"/>
+          <p:cNvPr id="961" name="tb962"/>
           <p:cNvSpPr txBox="1"/>
           <p:nvPr/>
         </p:nvSpPr>
@@ -15210,7 +14453,7 @@
       </p:sp>
       <p:sp>
         <p:nvSpPr>
-          <p:cNvPr id="935" name="tb936"/>
+          <p:cNvPr id="963" name="tb964"/>
           <p:cNvSpPr txBox="1"/>
           <p:nvPr/>
         </p:nvSpPr>
@@ -15262,7 +14505,7 @@
       </p:sp>
       <p:sp>
         <p:nvSpPr>
-          <p:cNvPr id="937" name="rc938"/>
+          <p:cNvPr id="965" name="rc966"/>
           <p:cNvSpPr/>
           <p:nvPr/>
         </p:nvSpPr>
@@ -15293,7 +14536,7 @@
       </p:sp>
       <p:sp>
         <p:nvSpPr>
-          <p:cNvPr id="939" name="tb940"/>
+          <p:cNvPr id="967" name="tb968"/>
           <p:cNvSpPr txBox="1"/>
           <p:nvPr/>
         </p:nvSpPr>
@@ -15345,7 +14588,7 @@
       </p:sp>
       <p:sp>
         <p:nvSpPr>
-          <p:cNvPr id="941" name="tb942"/>
+          <p:cNvPr id="969" name="tb970"/>
           <p:cNvSpPr txBox="1"/>
           <p:nvPr/>
         </p:nvSpPr>
@@ -15397,7 +14640,7 @@
       </p:sp>
       <p:sp>
         <p:nvSpPr>
-          <p:cNvPr id="943" name="rc944"/>
+          <p:cNvPr id="971" name="rc972"/>
           <p:cNvSpPr/>
           <p:nvPr/>
         </p:nvSpPr>
@@ -15428,7 +14671,7 @@
       </p:sp>
       <p:sp>
         <p:nvSpPr>
-          <p:cNvPr id="945" name="tb946"/>
+          <p:cNvPr id="973" name="tb974"/>
           <p:cNvSpPr txBox="1"/>
           <p:nvPr/>
         </p:nvSpPr>
@@ -15480,7 +14723,7 @@
       </p:sp>
       <p:sp>
         <p:nvSpPr>
-          <p:cNvPr id="947" name="tb948"/>
+          <p:cNvPr id="975" name="tb976"/>
           <p:cNvSpPr txBox="1"/>
           <p:nvPr/>
         </p:nvSpPr>
@@ -15525,14 +14768,14 @@
                 <a:cs typeface="Roboto"/>
                 <a:sym typeface="Roboto"/>
               </a:rPr>
-              <a:t>true gap — no model output yet: add, derive, enable or drop</a:t>
+              <a:t>NEW CMIP7 variables — requested, not produced by CMCC-ESM3 today</a:t>
             </a:r>
           </a:p>
         </p:txBody>
       </p:sp>
       <p:sp>
         <p:nvSpPr>
-          <p:cNvPr id="949" name="tb950"/>
+          <p:cNvPr id="977" name="tb978"/>
           <p:cNvSpPr txBox="1"/>
           <p:nvPr/>
         </p:nvSpPr>
@@ -15577,14 +14820,14 @@
                 <a:cs typeface="Roboto"/>
                 <a:sym typeface="Roboto"/>
               </a:rPr>
-              <a:t>Gaps by realm: land 96, atmos 65, ocean BGC 55, aerosol 49, ocean 34, atmos chemistry 23, sea ice 18, land ice 10. Aerosol and atmospheric chemistry are almost entirely gaps (2 of 75 producible).</a:t>
+              <a:t>New CMIP7 variables by realm: land 96, atmos 65, ocean BGC 55, aerosol 49, ocean 34, atmos chemistry 23, sea ice 18, land ice 10. Aerosol and atmospheric chemistry are almost entirely new (2 of 75 producible).</a:t>
             </a:r>
           </a:p>
         </p:txBody>
       </p:sp>
       <p:sp>
         <p:nvSpPr>
-          <p:cNvPr id="951" name="tb952"/>
+          <p:cNvPr id="979" name="tb980"/>
           <p:cNvSpPr txBox="1"/>
           <p:nvPr/>
         </p:nvSpPr>
@@ -15738,7 +14981,7 @@
                 <a:cs typeface="Montserrat"/>
                 <a:sym typeface="Montserrat"/>
               </a:rPr>
-              <a:t>CMCC AR7-FT Data Request (2)</a:t>
+              <a:t>CMCC AR7-FT Data Request (3)</a:t>
             </a:r>
             <a:endParaRPr sz="3200" b="0" i="0" u="none" strike="noStrike" cap="none">
               <a:solidFill>
@@ -15893,7 +15136,7 @@
       </p:pic>
       <p:sp>
         <p:nvSpPr>
-          <p:cNvPr id="953" name="tb954"/>
+          <p:cNvPr id="981" name="tb982"/>
           <p:cNvSpPr txBox="1"/>
           <p:nvPr/>
         </p:nvSpPr>
@@ -15945,7 +15188,7 @@
       </p:sp>
       <p:sp>
         <p:nvSpPr>
-          <p:cNvPr id="955" name="rc956"/>
+          <p:cNvPr id="983" name="rc984"/>
           <p:cNvSpPr/>
           <p:nvPr/>
         </p:nvSpPr>
@@ -15978,7 +15221,7 @@
       </p:sp>
       <p:sp>
         <p:nvSpPr>
-          <p:cNvPr id="957" name="tb958"/>
+          <p:cNvPr id="985" name="tb986"/>
           <p:cNvSpPr txBox="1"/>
           <p:nvPr/>
         </p:nvSpPr>
@@ -16068,7 +15311,7 @@
       </p:sp>
       <p:sp>
         <p:nvSpPr>
-          <p:cNvPr id="959" name="rc960"/>
+          <p:cNvPr id="987" name="rc988"/>
           <p:cNvSpPr/>
           <p:nvPr/>
         </p:nvSpPr>
@@ -16101,7 +15344,7 @@
       </p:sp>
       <p:sp>
         <p:nvSpPr>
-          <p:cNvPr id="961" name="tb962"/>
+          <p:cNvPr id="989" name="tb990"/>
           <p:cNvSpPr txBox="1"/>
           <p:nvPr/>
         </p:nvSpPr>
@@ -16184,14 +15427,14 @@
                 <a:cs typeface="Roboto"/>
                 <a:sym typeface="Roboto"/>
               </a:rPr>
-              <a:t>extra storage to cover every true gap</a:t>
+              <a:t>extra storage for the new CMIP7 variables</a:t>
             </a:r>
           </a:p>
         </p:txBody>
       </p:sp>
       <p:sp>
         <p:nvSpPr>
-          <p:cNvPr id="963" name="rc964"/>
+          <p:cNvPr id="991" name="rc992"/>
           <p:cNvSpPr/>
           <p:nvPr/>
         </p:nvSpPr>
@@ -16224,7 +15467,7 @@
       </p:sp>
       <p:sp>
         <p:nvSpPr>
-          <p:cNvPr id="965" name="tb966"/>
+          <p:cNvPr id="993" name="tb994"/>
           <p:cNvSpPr txBox="1"/>
           <p:nvPr/>
         </p:nvSpPr>
@@ -16314,13 +15557,170 @@
       </p:sp>
       <p:sp>
         <p:nvSpPr>
-          <p:cNvPr id="967" name="tb968"/>
+          <p:cNvPr id="995" name="rc996"/>
+          <p:cNvSpPr/>
+          <p:nvPr/>
+        </p:nvSpPr>
+        <p:spPr>
+          <a:xfrm>
+            <a:off x="777240" y="2724912"/>
+            <a:ext cx="10634472" cy="512064"/>
+          </a:xfrm>
+          <a:prstGeom prst="roundRect">
+            <a:avLst>
+              <a:gd name="adj" fmla="val 14285"/>
+            </a:avLst>
+          </a:prstGeom>
+          <a:solidFill>
+            <a:srgbClr val="F1F4F9"/>
+          </a:solidFill>
+          <a:ln>
+            <a:noFill/>
+          </a:ln>
+        </p:spPr>
+        <p:txBody>
+          <a:bodyPr/>
+          <a:lstStyle/>
+          <a:p>
+            <a:pPr algn="l" rtl="0">
+              <a:buNone/>
+            </a:pPr>
+          </a:p>
+        </p:txBody>
+      </p:sp>
+      <p:sp>
+        <p:nvSpPr>
+          <p:cNvPr id="997" name="tb998"/>
           <p:cNvSpPr txBox="1"/>
           <p:nvPr/>
         </p:nvSpPr>
         <p:spPr>
           <a:xfrm>
-            <a:off x="777240" y="2889504"/>
+            <a:off x="886968" y="2724912"/>
+            <a:ext cx="10415016" cy="512064"/>
+          </a:xfrm>
+          <a:prstGeom prst="rect">
+            <a:avLst/>
+          </a:prstGeom>
+          <a:noFill/>
+          <a:ln>
+            <a:noFill/>
+          </a:ln>
+        </p:spPr>
+        <p:txBody>
+          <a:bodyPr spcFirstLastPara="1" wrap="square" lIns="0" tIns="0" rIns="0" bIns="0" anchor="ctr" anchorCtr="0">
+            <a:noAutofit/>
+          </a:bodyPr>
+          <a:lstStyle/>
+          <a:p>
+            <a:pPr marL="0" indent="0" algn="l" rtl="0">
+              <a:lnSpc>
+                <a:spcPct val="100000"/>
+              </a:lnSpc>
+              <a:spcBef>
+                <a:spcPts val="0"/>
+              </a:spcBef>
+              <a:spcAft>
+                <a:spcPts val="0"/>
+              </a:spcAft>
+              <a:buNone/>
+            </a:pPr>
+            <a:r>
+              <a:rPr lang="en-GB" sz="1250" b="1" i="0">
+                <a:solidFill>
+                  <a:srgbClr val="1F3864"/>
+                </a:solidFill>
+                <a:latin typeface="Montserrat"/>
+                <a:ea typeface="Montserrat"/>
+                <a:cs typeface="Montserrat"/>
+                <a:sym typeface="Montserrat"/>
+              </a:rPr>
+              <a:t>AR7 fast-track ≈ 2500 model-years  →  </a:t>
+            </a:r>
+            <a:r>
+              <a:rPr lang="en-GB" sz="1250" b="1" i="0">
+                <a:solidFill>
+                  <a:srgbClr val="4472C4"/>
+                </a:solidFill>
+                <a:latin typeface="Montserrat"/>
+                <a:ea typeface="Montserrat"/>
+                <a:cs typeface="Montserrat"/>
+                <a:sym typeface="Montserrat"/>
+              </a:rPr>
+              <a:t>0.51 PB</a:t>
+            </a:r>
+            <a:r>
+              <a:rPr lang="en-GB" sz="1250" b="0" i="0">
+                <a:solidFill>
+                  <a:srgbClr val="595959"/>
+                </a:solidFill>
+                <a:latin typeface="Roboto"/>
+                <a:ea typeface="Roboto"/>
+                <a:cs typeface="Roboto"/>
+                <a:sym typeface="Roboto"/>
+              </a:rPr>
+              <a:t> produced  ·  </a:t>
+            </a:r>
+            <a:r>
+              <a:rPr lang="en-GB" sz="1250" b="1" i="0">
+                <a:solidFill>
+                  <a:srgbClr val="ED7D31"/>
+                </a:solidFill>
+                <a:latin typeface="Montserrat"/>
+                <a:ea typeface="Montserrat"/>
+                <a:cs typeface="Montserrat"/>
+                <a:sym typeface="Montserrat"/>
+              </a:rPr>
+              <a:t>+0.53 PB</a:t>
+            </a:r>
+            <a:r>
+              <a:rPr lang="en-GB" sz="1250" b="0" i="0">
+                <a:solidFill>
+                  <a:srgbClr val="595959"/>
+                </a:solidFill>
+                <a:latin typeface="Roboto"/>
+                <a:ea typeface="Roboto"/>
+                <a:cs typeface="Roboto"/>
+                <a:sym typeface="Roboto"/>
+              </a:rPr>
+              <a:t> new CMIP7 variables  ·  </a:t>
+            </a:r>
+            <a:r>
+              <a:rPr lang="en-GB" sz="1250" b="1" i="0">
+                <a:solidFill>
+                  <a:srgbClr val="1F3864"/>
+                </a:solidFill>
+                <a:latin typeface="Montserrat"/>
+                <a:ea typeface="Montserrat"/>
+                <a:cs typeface="Montserrat"/>
+                <a:sym typeface="Montserrat"/>
+              </a:rPr>
+              <a:t>1.04 PB</a:t>
+            </a:r>
+            <a:r>
+              <a:rPr lang="en-GB" sz="1250" b="0" i="0">
+                <a:solidFill>
+                  <a:srgbClr val="595959"/>
+                </a:solidFill>
+                <a:latin typeface="Roboto"/>
+                <a:ea typeface="Roboto"/>
+                <a:cs typeface="Roboto"/>
+                <a:sym typeface="Roboto"/>
+              </a:rPr>
+              <a:t> full request</a:t>
+            </a:r>
+          </a:p>
+        </p:txBody>
+      </p:sp>
+      <p:sp>
+        <p:nvSpPr>
+          <p:cNvPr id="999" name="tb1000"/>
+          <p:cNvSpPr txBox="1"/>
+          <p:nvPr/>
+        </p:nvSpPr>
+        <p:spPr>
+          <a:xfrm>
+            <a:off x="777240" y="3346704"/>
             <a:ext cx="5577840" cy="329184"/>
           </a:xfrm>
           <a:prstGeom prst="rect">
@@ -16366,14 +15766,14 @@
       </p:sp>
       <p:sp>
         <p:nvSpPr>
-          <p:cNvPr id="969" name="tb970"/>
+          <p:cNvPr id="1001" name="tb1002"/>
           <p:cNvSpPr txBox="1"/>
           <p:nvPr/>
         </p:nvSpPr>
         <p:spPr>
           <a:xfrm>
-            <a:off x="777240" y="3273552"/>
-            <a:ext cx="5577840" cy="2377440"/>
+            <a:off x="777240" y="3712463"/>
+            <a:ext cx="5577840" cy="2011680"/>
           </a:xfrm>
           <a:prstGeom prst="rect">
             <a:avLst/>
@@ -16415,7 +15815,7 @@
                 <a:cs typeface="Roboto"/>
                 <a:sym typeface="Roboto"/>
               </a:rPr>
-              <a:t>Ocean 3-hourly is the whole story: 174 of the 224 GB gap (daily 41, monthly 10)</a:t>
+              <a:t>Ocean 3-hourly is the whole story: 174 of the 224 GB of new variables (daily 41, monthly 10)</a:t>
             </a:r>
           </a:p>
           <a:p>
@@ -16445,7 +15845,7 @@
                 <a:cs typeface="Roboto"/>
                 <a:sym typeface="Roboto"/>
               </a:rPr>
-              <a:t>Two fields alone are 76 % of the gap — ficeberg 86 and hfrunoffds 85 GB/yr</a:t>
+              <a:t>Two fields alone are 76 % of it — ficeberg 86 and hfrunoffds 85 GB/yr</a:t>
             </a:r>
           </a:p>
           <a:p>
@@ -16475,7 +15875,7 @@
                 <a:cs typeface="Roboto"/>
                 <a:sym typeface="Roboto"/>
               </a:rPr>
-              <a:t>One 3-D ocean field at 3hr ≈ 92 GB/yr; the same field at 3-D atmos ≈ 33 GB/yr</a:t>
+              <a:t>One 3-D ocean field at 3hr ≈ 92 GB/yr; a 3-D atmos field ≈ 33 GB/yr</a:t>
             </a:r>
           </a:p>
           <a:p>
@@ -16505,25 +15905,25 @@
                 <a:cs typeface="Roboto"/>
                 <a:sym typeface="Roboto"/>
               </a:rPr>
-              <a:t>6-hourly and 1-hourly requests have no gaps — 82 and 14 GB/yr, produced today</a:t>
+              <a:t>6-hourly and 1-hourly requests need nothing new — 82 and 14 GB/yr, produced today</a:t>
             </a:r>
           </a:p>
         </p:txBody>
       </p:sp>
       <p:sp>
         <p:nvSpPr>
-          <p:cNvPr id="971" name="rc972"/>
+          <p:cNvPr id="1003" name="rc1004"/>
           <p:cNvSpPr/>
           <p:nvPr/>
         </p:nvSpPr>
         <p:spPr>
           <a:xfrm>
-            <a:off x="777240" y="5358384"/>
-            <a:ext cx="5577840" cy="475488"/>
+            <a:off x="777240" y="5504688"/>
+            <a:ext cx="5577840" cy="457200"/>
           </a:xfrm>
           <a:prstGeom prst="roundRect">
             <a:avLst>
-              <a:gd name="adj" fmla="val 15384"/>
+              <a:gd name="adj" fmla="val 16000"/>
             </a:avLst>
           </a:prstGeom>
           <a:solidFill>
@@ -16545,14 +15945,14 @@
       </p:sp>
       <p:sp>
         <p:nvSpPr>
-          <p:cNvPr id="973" name="tb974"/>
+          <p:cNvPr id="1005" name="tb1006"/>
           <p:cNvSpPr txBox="1"/>
           <p:nvPr/>
         </p:nvSpPr>
         <p:spPr>
           <a:xfrm>
-            <a:off x="886968" y="5358384"/>
-            <a:ext cx="5358384" cy="475488"/>
+            <a:off x="886968" y="5504688"/>
+            <a:ext cx="5358384" cy="457200"/>
           </a:xfrm>
           <a:prstGeom prst="rect">
             <a:avLst/>
@@ -16609,13 +16009,13 @@
       </p:sp>
       <p:sp>
         <p:nvSpPr>
-          <p:cNvPr id="975" name="tb976"/>
+          <p:cNvPr id="1007" name="tb1008"/>
           <p:cNvSpPr txBox="1"/>
           <p:nvPr/>
         </p:nvSpPr>
         <p:spPr>
           <a:xfrm>
-            <a:off x="6812280" y="2889504"/>
+            <a:off x="6812280" y="3346704"/>
             <a:ext cx="4599432" cy="329184"/>
           </a:xfrm>
           <a:prstGeom prst="rect">
@@ -16661,13 +16061,13 @@
       </p:sp>
       <p:sp>
         <p:nvSpPr>
-          <p:cNvPr id="977" name="tb978"/>
+          <p:cNvPr id="1009" name="tb1010"/>
           <p:cNvSpPr txBox="1"/>
           <p:nvPr/>
         </p:nvSpPr>
         <p:spPr>
           <a:xfrm>
-            <a:off x="6812280" y="3328416"/>
+            <a:off x="6812280" y="3730752"/>
             <a:ext cx="4599432" cy="256032"/>
           </a:xfrm>
           <a:prstGeom prst="rect">
@@ -16713,14 +16113,14 @@
       </p:sp>
       <p:sp>
         <p:nvSpPr>
-          <p:cNvPr id="979" name="rc980"/>
+          <p:cNvPr id="1011" name="rc1012"/>
           <p:cNvSpPr/>
           <p:nvPr/>
         </p:nvSpPr>
         <p:spPr>
           <a:xfrm>
-            <a:off x="6812280" y="3602736"/>
-            <a:ext cx="962526" cy="274320"/>
+            <a:off x="6812280" y="3986783"/>
+            <a:ext cx="962526" cy="256032"/>
           </a:xfrm>
           <a:prstGeom prst="rect">
             <a:avLst/>
@@ -16744,13 +16144,13 @@
       </p:sp>
       <p:sp>
         <p:nvSpPr>
-          <p:cNvPr id="981" name="tb982"/>
+          <p:cNvPr id="1013" name="tb1014"/>
           <p:cNvSpPr txBox="1"/>
           <p:nvPr/>
         </p:nvSpPr>
         <p:spPr>
           <a:xfrm>
-            <a:off x="7829670" y="3584448"/>
+            <a:off x="7829670" y="3968496"/>
             <a:ext cx="914400" cy="292608"/>
           </a:xfrm>
           <a:prstGeom prst="rect">
@@ -16796,13 +16196,13 @@
       </p:sp>
       <p:sp>
         <p:nvSpPr>
-          <p:cNvPr id="983" name="tb984"/>
+          <p:cNvPr id="1015" name="tb1016"/>
           <p:cNvSpPr txBox="1"/>
           <p:nvPr/>
         </p:nvSpPr>
         <p:spPr>
           <a:xfrm>
-            <a:off x="6812280" y="4059936"/>
+            <a:off x="6812280" y="4389120"/>
             <a:ext cx="4599432" cy="256032"/>
           </a:xfrm>
           <a:prstGeom prst="rect">
@@ -16848,14 +16248,14 @@
       </p:sp>
       <p:sp>
         <p:nvSpPr>
-          <p:cNvPr id="985" name="rc986"/>
+          <p:cNvPr id="1017" name="rc1018"/>
           <p:cNvSpPr/>
           <p:nvPr/>
         </p:nvSpPr>
         <p:spPr>
           <a:xfrm>
-            <a:off x="6812280" y="4334256"/>
-            <a:ext cx="2050181" cy="274320"/>
+            <a:off x="6812280" y="4645151"/>
+            <a:ext cx="2050181" cy="256032"/>
           </a:xfrm>
           <a:prstGeom prst="rect">
             <a:avLst/>
@@ -16879,13 +16279,13 @@
       </p:sp>
       <p:sp>
         <p:nvSpPr>
-          <p:cNvPr id="987" name="tb988"/>
+          <p:cNvPr id="1019" name="tb1020"/>
           <p:cNvSpPr txBox="1"/>
           <p:nvPr/>
         </p:nvSpPr>
         <p:spPr>
           <a:xfrm>
-            <a:off x="8917325" y="4315968"/>
+            <a:off x="8917325" y="4626864"/>
             <a:ext cx="914400" cy="292608"/>
           </a:xfrm>
           <a:prstGeom prst="rect">
@@ -16931,13 +16331,13 @@
       </p:sp>
       <p:sp>
         <p:nvSpPr>
-          <p:cNvPr id="989" name="tb990"/>
+          <p:cNvPr id="1021" name="tb1022"/>
           <p:cNvSpPr txBox="1"/>
           <p:nvPr/>
         </p:nvSpPr>
         <p:spPr>
           <a:xfrm>
-            <a:off x="6812280" y="4791456"/>
+            <a:off x="6812280" y="5047488"/>
             <a:ext cx="4599432" cy="256032"/>
           </a:xfrm>
           <a:prstGeom prst="rect">
@@ -16983,14 +16383,14 @@
       </p:sp>
       <p:sp>
         <p:nvSpPr>
-          <p:cNvPr id="991" name="rc992"/>
+          <p:cNvPr id="1023" name="rc1024"/>
           <p:cNvSpPr/>
           <p:nvPr/>
         </p:nvSpPr>
         <p:spPr>
           <a:xfrm>
-            <a:off x="6812280" y="5065776"/>
-            <a:ext cx="2050181" cy="274320"/>
+            <a:off x="6812280" y="5303519"/>
+            <a:ext cx="2050181" cy="256032"/>
           </a:xfrm>
           <a:prstGeom prst="rect">
             <a:avLst/>
@@ -17014,14 +16414,14 @@
       </p:sp>
       <p:sp>
         <p:nvSpPr>
-          <p:cNvPr id="993" name="rc994"/>
+          <p:cNvPr id="1025" name="rc1026"/>
           <p:cNvSpPr/>
           <p:nvPr/>
         </p:nvSpPr>
         <p:spPr>
           <a:xfrm>
-            <a:off x="8862461" y="5065776"/>
-            <a:ext cx="2156058" cy="274320"/>
+            <a:off x="8862461" y="5303519"/>
+            <a:ext cx="2156058" cy="256032"/>
           </a:xfrm>
           <a:prstGeom prst="rect">
             <a:avLst/>
@@ -17045,13 +16445,13 @@
       </p:sp>
       <p:sp>
         <p:nvSpPr>
-          <p:cNvPr id="995" name="tb996"/>
+          <p:cNvPr id="1027" name="tb1028"/>
           <p:cNvSpPr txBox="1"/>
           <p:nvPr/>
         </p:nvSpPr>
         <p:spPr>
           <a:xfrm>
-            <a:off x="11073384" y="5047488"/>
+            <a:off x="11073384" y="5285231"/>
             <a:ext cx="914400" cy="292608"/>
           </a:xfrm>
           <a:prstGeom prst="rect">
@@ -17097,14 +16497,14 @@
       </p:sp>
       <p:sp>
         <p:nvSpPr>
-          <p:cNvPr id="997" name="tb998"/>
+          <p:cNvPr id="1029" name="tb1030"/>
           <p:cNvSpPr txBox="1"/>
           <p:nvPr/>
         </p:nvSpPr>
         <p:spPr>
           <a:xfrm>
-            <a:off x="6812280" y="5541264"/>
-            <a:ext cx="4599432" cy="292608"/>
+            <a:off x="6812280" y="5742432"/>
+            <a:ext cx="4599432" cy="274320"/>
           </a:xfrm>
           <a:prstGeom prst="rect">
             <a:avLst/>
@@ -17142,20 +16542,20 @@
                 <a:cs typeface="Roboto"/>
                 <a:sym typeface="Roboto"/>
               </a:rPr>
-              <a:t>blue = produced   ·   orange = still to be produced</a:t>
+              <a:t>blue = produced   ·   orange = new CMIP7 variables</a:t>
             </a:r>
           </a:p>
         </p:txBody>
       </p:sp>
       <p:sp>
         <p:nvSpPr>
-          <p:cNvPr id="999" name="tb1000"/>
+          <p:cNvPr id="1031" name="tb1032"/>
           <p:cNvSpPr txBox="1"/>
           <p:nvPr/>
         </p:nvSpPr>
         <p:spPr>
           <a:xfrm>
-            <a:off x="777240" y="5925312"/>
+            <a:off x="777240" y="6089904"/>
             <a:ext cx="10634472" cy="777240"/>
           </a:xfrm>
           <a:prstGeom prst="rect">
@@ -17194,7 +16594,7 @@
                 <a:cs typeface="Roboto"/>
                 <a:sym typeface="Roboto"/>
               </a:rPr>
-              <a:t>Grid: CAM/CLM spectral element ncol 48600 × L58, NEMO 360×291 × L75, float32; calibrated on a real B1850 run and validated against its files (thetao monthly 377 MB/yr, zos 5 MB/yr). Archived, deflated size ≈ half.</a:t>
+              <a:t>Grid: CAM/CLM spectral element ncol 48600 × L58, NEMO 360×291 × L75, float32; calibrated on a real B1850 run and validated against its files (thetao monthly 377 MB/yr, zos 5 MB/yr). Archived, deflated size ≈ half. 1 PB = 1024 TB = 1024² GB.</a:t>
             </a:r>
           </a:p>
           <a:p>
@@ -17220,7 +16620,7 @@
                 <a:cs typeface="Roboto"/>
                 <a:sym typeface="Roboto"/>
               </a:rPr>
-              <a:t>Gaps are tracked as open rows in the per-component CMOR↔raw lookup tables (386 to resolve): fill the raw model name and the variable enters the production list automatically.</a:t>
+              <a:t>New CMIP7 variables are tracked as open rows in the per-component CMOR↔raw lookup tables (386 to resolve): fill the raw model name and the variable enters the production list automatically.</a:t>
             </a:r>
           </a:p>
         </p:txBody>
@@ -17233,12 +16633,12 @@
 </p:sld>
 </file>
 
-<file path=ppt/slides/slide4.xml><?xml version="1.0" encoding="utf-8"?>
+<file path=ppt/slides/slide5.xml><?xml version="1.0" encoding="utf-8"?>
 <p:sld xmlns:a="http://schemas.openxmlformats.org/drawingml/2006/main" xmlns:r="http://schemas.openxmlformats.org/officeDocument/2006/relationships" xmlns:p="http://schemas.openxmlformats.org/presentationml/2006/main">
   <p:cSld>
     <p:spTree>
       <p:nvGrpSpPr>
-        <p:cNvPr id="1" name="Shape 293"/>
+        <p:cNvPr id="1" name="Shape 243"/>
         <p:cNvGrpSpPr/>
         <p:nvPr/>
       </p:nvGrpSpPr>
@@ -17252,7 +16652,7 @@
       </p:grpSpPr>
       <p:pic>
         <p:nvPicPr>
-          <p:cNvPr id="294" name="Google Shape;294;p30" descr="Immagine che contiene Terra, pianeta, Spazio esterno, Oggetto astronomico  Descrizione generata automaticamente"/>
+          <p:cNvPr id="244" name="Google Shape;244;p25"/>
           <p:cNvPicPr preferRelativeResize="0"/>
           <p:nvPr/>
         </p:nvPicPr>
@@ -17265,8 +16665,8 @@
         </p:blipFill>
         <p:spPr>
           <a:xfrm>
-            <a:off x="-1" y="12290"/>
-            <a:ext cx="12213931" cy="6845710"/>
+            <a:off x="-11274" y="0"/>
+            <a:ext cx="12203273" cy="1025480"/>
           </a:xfrm>
           <a:prstGeom prst="rect">
             <a:avLst/>
@@ -17277,9 +16677,187 @@
           </a:ln>
         </p:spPr>
       </p:pic>
+      <p:sp>
+        <p:nvSpPr>
+          <p:cNvPr id="245" name="Google Shape;245;p25"/>
+          <p:cNvSpPr txBox="1"/>
+          <p:nvPr/>
+        </p:nvSpPr>
+        <p:spPr>
+          <a:xfrm>
+            <a:off x="672531" y="361025"/>
+            <a:ext cx="8743800" cy="522000"/>
+          </a:xfrm>
+          <a:prstGeom prst="rect">
+            <a:avLst/>
+          </a:prstGeom>
+          <a:noFill/>
+          <a:ln>
+            <a:noFill/>
+          </a:ln>
+        </p:spPr>
+        <p:txBody>
+          <a:bodyPr spcFirstLastPara="1" wrap="square" lIns="91425" tIns="45700" rIns="91425" bIns="45700" anchor="ctr" anchorCtr="0">
+            <a:noAutofit/>
+          </a:bodyPr>
+          <a:lstStyle/>
+          <a:p>
+            <a:pPr marL="0" marR="0" lvl="0" indent="0" algn="l" rtl="0">
+              <a:lnSpc>
+                <a:spcPct val="90000"/>
+              </a:lnSpc>
+              <a:spcBef>
+                <a:spcPts val="0"/>
+              </a:spcBef>
+              <a:spcAft>
+                <a:spcPts val="0"/>
+              </a:spcAft>
+              <a:buClr>
+                <a:schemeClr val="dk1"/>
+              </a:buClr>
+              <a:buSzPts val="4400"/>
+              <a:buFont typeface="Calibri"/>
+              <a:buNone/>
+            </a:pPr>
+            <a:r>
+              <a:rPr lang="it-IT" sz="3200" b="1">
+                <a:solidFill>
+                  <a:schemeClr val="lt1"/>
+                </a:solidFill>
+                <a:latin typeface="Montserrat"/>
+                <a:ea typeface="Montserrat"/>
+                <a:cs typeface="Montserrat"/>
+                <a:sym typeface="Montserrat"/>
+              </a:rPr>
+              <a:t>CMCC AR7-FT Data Request (1)</a:t>
+            </a:r>
+            <a:endParaRPr sz="3200" b="0" i="0" u="none" strike="noStrike" cap="none">
+              <a:solidFill>
+                <a:schemeClr val="lt1"/>
+              </a:solidFill>
+              <a:latin typeface="Arial"/>
+              <a:ea typeface="Arial"/>
+              <a:cs typeface="Arial"/>
+              <a:sym typeface="Arial"/>
+            </a:endParaRPr>
+          </a:p>
+        </p:txBody>
+      </p:sp>
+      <p:sp>
+        <p:nvSpPr>
+          <p:cNvPr id="246" name="Google Shape;246;p25"/>
+          <p:cNvSpPr/>
+          <p:nvPr/>
+        </p:nvSpPr>
+        <p:spPr>
+          <a:xfrm>
+            <a:off x="-151579" y="1019517"/>
+            <a:ext cx="12483900" cy="45600"/>
+          </a:xfrm>
+          <a:prstGeom prst="rect">
+            <a:avLst/>
+          </a:prstGeom>
+          <a:solidFill>
+            <a:schemeClr val="lt2"/>
+          </a:solidFill>
+          <a:ln>
+            <a:noFill/>
+          </a:ln>
+        </p:spPr>
+        <p:txBody>
+          <a:bodyPr spcFirstLastPara="1" wrap="square" lIns="91425" tIns="45700" rIns="91425" bIns="45700" anchor="ctr" anchorCtr="0">
+            <a:noAutofit/>
+          </a:bodyPr>
+          <a:lstStyle/>
+          <a:p>
+            <a:pPr marL="0" marR="0" lvl="0" indent="0" algn="ctr" rtl="0">
+              <a:lnSpc>
+                <a:spcPct val="100000"/>
+              </a:lnSpc>
+              <a:spcBef>
+                <a:spcPts val="0"/>
+              </a:spcBef>
+              <a:spcAft>
+                <a:spcPts val="0"/>
+              </a:spcAft>
+              <a:buClr>
+                <a:srgbClr val="000000"/>
+              </a:buClr>
+              <a:buSzPts val="1400"/>
+              <a:buFont typeface="Arial"/>
+              <a:buNone/>
+            </a:pPr>
+            <a:endParaRPr sz="1400" b="0" i="0" u="none" strike="noStrike" cap="none">
+              <a:solidFill>
+                <a:srgbClr val="00B0F0"/>
+              </a:solidFill>
+              <a:latin typeface="Arial"/>
+              <a:ea typeface="Arial"/>
+              <a:cs typeface="Arial"/>
+              <a:sym typeface="Arial"/>
+            </a:endParaRPr>
+          </a:p>
+        </p:txBody>
+      </p:sp>
+      <p:sp>
+        <p:nvSpPr>
+          <p:cNvPr id="247" name="Google Shape;247;p25"/>
+          <p:cNvSpPr/>
+          <p:nvPr/>
+        </p:nvSpPr>
+        <p:spPr>
+          <a:xfrm>
+            <a:off x="-11274" y="6786545"/>
+            <a:ext cx="12203400" cy="89100"/>
+          </a:xfrm>
+          <a:prstGeom prst="rect">
+            <a:avLst/>
+          </a:prstGeom>
+          <a:solidFill>
+            <a:schemeClr val="accent1"/>
+          </a:solidFill>
+          <a:ln>
+            <a:noFill/>
+          </a:ln>
+        </p:spPr>
+        <p:txBody>
+          <a:bodyPr spcFirstLastPara="1" wrap="square" lIns="91425" tIns="45700" rIns="91425" bIns="45700" anchor="ctr" anchorCtr="0">
+            <a:noAutofit/>
+          </a:bodyPr>
+          <a:lstStyle/>
+          <a:p>
+            <a:pPr marL="0" marR="0" lvl="0" indent="0" algn="ctr" rtl="0">
+              <a:lnSpc>
+                <a:spcPct val="100000"/>
+              </a:lnSpc>
+              <a:spcBef>
+                <a:spcPts val="0"/>
+              </a:spcBef>
+              <a:spcAft>
+                <a:spcPts val="0"/>
+              </a:spcAft>
+              <a:buClr>
+                <a:srgbClr val="000000"/>
+              </a:buClr>
+              <a:buSzPts val="1400"/>
+              <a:buFont typeface="Arial"/>
+              <a:buNone/>
+            </a:pPr>
+            <a:endParaRPr sz="1400" b="0" i="0" u="none" strike="noStrike" cap="none">
+              <a:solidFill>
+                <a:schemeClr val="lt1"/>
+              </a:solidFill>
+              <a:latin typeface="Arial"/>
+              <a:ea typeface="Arial"/>
+              <a:cs typeface="Arial"/>
+              <a:sym typeface="Arial"/>
+            </a:endParaRPr>
+          </a:p>
+        </p:txBody>
+      </p:sp>
       <p:pic>
         <p:nvPicPr>
-          <p:cNvPr id="295" name="Google Shape;295;p30"/>
+          <p:cNvPr id="248" name="Google Shape;248;p25" descr="Immagine che contiene Carattere, Elementi grafici, logo, simbolo  Descrizione generata automaticamente"/>
           <p:cNvPicPr preferRelativeResize="0"/>
           <p:nvPr/>
         </p:nvPicPr>
@@ -17292,8 +16870,8 @@
         </p:blipFill>
         <p:spPr>
           <a:xfrm>
-            <a:off x="2162966" y="464098"/>
-            <a:ext cx="7389595" cy="5118584"/>
+            <a:off x="9727799" y="207657"/>
+            <a:ext cx="1978358" cy="675420"/>
           </a:xfrm>
           <a:prstGeom prst="rect">
             <a:avLst/>
@@ -17306,14 +16884,14 @@
       </p:pic>
       <p:sp>
         <p:nvSpPr>
-          <p:cNvPr id="296" name="Google Shape;296;p30"/>
+          <p:cNvPr id="901" name="tb902"/>
           <p:cNvSpPr txBox="1"/>
           <p:nvPr/>
         </p:nvSpPr>
         <p:spPr>
           <a:xfrm>
-            <a:off x="4551973" y="3505546"/>
-            <a:ext cx="2611579" cy="400110"/>
+            <a:off x="777240" y="1133856"/>
+            <a:ext cx="10634472" cy="310896"/>
           </a:xfrm>
           <a:prstGeom prst="rect">
             <a:avLst/>
@@ -17324,69 +16902,48 @@
           </a:ln>
         </p:spPr>
         <p:txBody>
-          <a:bodyPr spcFirstLastPara="1" wrap="square" lIns="91425" tIns="45700" rIns="91425" bIns="45700" anchor="t" anchorCtr="0">
-            <a:spAutoFit/>
+          <a:bodyPr spcFirstLastPara="1" wrap="square" lIns="0" tIns="0" rIns="0" bIns="0" anchor="t" anchorCtr="0">
+            <a:noAutofit/>
           </a:bodyPr>
           <a:lstStyle/>
           <a:p>
-            <a:pPr marL="875664" marR="0" lvl="0" indent="0" algn="l" rtl="0">
-              <a:lnSpc>
-                <a:spcPct val="100000"/>
-              </a:lnSpc>
-              <a:spcBef>
-                <a:spcPts val="0"/>
-              </a:spcBef>
-              <a:spcAft>
-                <a:spcPts val="0"/>
-              </a:spcAft>
-              <a:buClr>
-                <a:srgbClr val="000000"/>
-              </a:buClr>
-              <a:buSzPts val="2000"/>
-              <a:buFont typeface="Arial"/>
+            <a:pPr marL="0" indent="0" algn="l" rtl="0">
+              <a:lnSpc>
+                <a:spcPct val="100000"/>
+              </a:lnSpc>
+              <a:spcBef>
+                <a:spcPts val="0"/>
+              </a:spcBef>
+              <a:spcAft>
+                <a:spcPts val="0"/>
+              </a:spcAft>
               <a:buNone/>
             </a:pPr>
             <a:r>
-              <a:rPr lang="it-IT" sz="2000" b="0" i="0" u="none" strike="noStrike" cap="none">
-                <a:solidFill>
-                  <a:srgbClr val="FFFFFF"/>
+              <a:rPr lang="en-GB" sz="1250" b="0" i="1">
+                <a:solidFill>
+                  <a:srgbClr val="595959"/>
                 </a:solidFill>
                 <a:latin typeface="Roboto"/>
                 <a:ea typeface="Roboto"/>
                 <a:cs typeface="Roboto"/>
                 <a:sym typeface="Roboto"/>
               </a:rPr>
-              <a:t>www.cmcc.it</a:t>
+              <a:t>The 30 opportunities of the Data Request v1.2.2.4 selected by the CMCC Divisions — 21 High and 9 Medium priority, 117 variable groups in total</a:t>
             </a:r>
-            <a:endParaRPr sz="2000" b="0" i="0" u="none" strike="noStrike" cap="none">
-              <a:solidFill>
-                <a:srgbClr val="000000"/>
-              </a:solidFill>
-              <a:latin typeface="Roboto"/>
-              <a:ea typeface="Roboto"/>
-              <a:cs typeface="Roboto"/>
-              <a:sym typeface="Roboto"/>
-            </a:endParaRPr>
           </a:p>
         </p:txBody>
       </p:sp>
-      <p:pic>
-        <p:nvPicPr>
-          <p:cNvPr id="297" name="Google Shape;297;p30"/>
-          <p:cNvPicPr preferRelativeResize="0"/>
+      <p:sp>
+        <p:nvSpPr>
+          <p:cNvPr id="903" name="tb904"/>
+          <p:cNvSpPr txBox="1"/>
           <p:nvPr/>
-        </p:nvPicPr>
-        <p:blipFill rotWithShape="1">
-          <a:blip r:embed="rId5">
-            <a:alphaModFix/>
-          </a:blip>
-          <a:srcRect/>
-          <a:stretch/>
-        </p:blipFill>
+        </p:nvSpPr>
         <p:spPr>
           <a:xfrm>
-            <a:off x="5481920" y="3997787"/>
-            <a:ext cx="751684" cy="359677"/>
+            <a:off x="777240" y="1463040"/>
+            <a:ext cx="10634472" cy="274320"/>
           </a:xfrm>
           <a:prstGeom prst="rect">
             <a:avLst/>
@@ -17396,7 +16953,1799 @@
             <a:noFill/>
           </a:ln>
         </p:spPr>
-      </p:pic>
+        <p:txBody>
+          <a:bodyPr spcFirstLastPara="1" wrap="square" lIns="0" tIns="0" rIns="0" bIns="0" anchor="t" anchorCtr="0">
+            <a:noAutofit/>
+          </a:bodyPr>
+          <a:lstStyle/>
+          <a:p>
+            <a:pPr marL="0" indent="0" algn="l" rtl="0">
+              <a:lnSpc>
+                <a:spcPct val="100000"/>
+              </a:lnSpc>
+              <a:spcBef>
+                <a:spcPts val="0"/>
+              </a:spcBef>
+              <a:spcAft>
+                <a:spcPts val="0"/>
+              </a:spcAft>
+              <a:buNone/>
+            </a:pPr>
+            <a:r>
+              <a:rPr lang="en-GB" sz="1000" b="0" i="1">
+                <a:solidFill>
+                  <a:srgbClr val="595959"/>
+                </a:solidFill>
+                <a:latin typeface="Roboto"/>
+                <a:ea typeface="Roboto"/>
+                <a:cs typeface="Roboto"/>
+                <a:sym typeface="Roboto"/>
+              </a:rPr>
+              <a:t>High priority in black, Medium in grey. An opportunity is a science-driven bundle of variable groups defined by the Data Request.</a:t>
+            </a:r>
+          </a:p>
+        </p:txBody>
+      </p:sp>
+      <p:sp>
+        <p:nvSpPr>
+          <p:cNvPr id="905" name="tb906"/>
+          <p:cNvSpPr txBox="1"/>
+          <p:nvPr/>
+        </p:nvSpPr>
+        <p:spPr>
+          <a:xfrm>
+            <a:off x="777240" y="1810512"/>
+            <a:ext cx="3392424" cy="3154680"/>
+          </a:xfrm>
+          <a:prstGeom prst="rect">
+            <a:avLst/>
+          </a:prstGeom>
+          <a:noFill/>
+          <a:ln>
+            <a:noFill/>
+          </a:ln>
+        </p:spPr>
+        <p:txBody>
+          <a:bodyPr spcFirstLastPara="1" wrap="square" lIns="0" tIns="0" rIns="0" bIns="0" anchor="t" anchorCtr="0">
+            <a:noAutofit/>
+          </a:bodyPr>
+          <a:lstStyle/>
+          <a:p>
+            <a:pPr marL="0" indent="0" algn="l" rtl="0">
+              <a:lnSpc>
+                <a:spcPct val="100000"/>
+              </a:lnSpc>
+              <a:spcBef>
+                <a:spcPts val="0"/>
+              </a:spcBef>
+              <a:spcAft>
+                <a:spcPts val="300"/>
+              </a:spcAft>
+              <a:buNone/>
+            </a:pPr>
+            <a:r>
+              <a:rPr lang="en-GB" sz="1250" b="1" i="0">
+                <a:solidFill>
+                  <a:srgbClr val="1F3864"/>
+                </a:solidFill>
+                <a:latin typeface="Montserrat"/>
+                <a:ea typeface="Montserrat"/>
+                <a:cs typeface="Montserrat"/>
+                <a:sym typeface="Montserrat"/>
+              </a:rPr>
+              <a:t>ESYDA  (12)</a:t>
+            </a:r>
+          </a:p>
+          <a:p>
+            <a:pPr marL="152400" indent="-152400" algn="l" rtl="0">
+              <a:lnSpc>
+                <a:spcPct val="102000"/>
+              </a:lnSpc>
+              <a:spcBef>
+                <a:spcPts val="0"/>
+              </a:spcBef>
+              <a:spcAft>
+                <a:spcPts val="280"/>
+              </a:spcAft>
+              <a:buClr>
+                <a:srgbClr val="4472C4"/>
+              </a:buClr>
+              <a:buFont typeface="Arial"/>
+              <a:buChar char="•"/>
+            </a:pPr>
+            <a:r>
+              <a:rPr lang="en-GB" sz="1050" b="0" i="0">
+                <a:solidFill>
+                  <a:srgbClr val="000000"/>
+                </a:solidFill>
+                <a:latin typeface="Roboto"/>
+                <a:ea typeface="Roboto"/>
+                <a:cs typeface="Roboto"/>
+                <a:sym typeface="Roboto"/>
+              </a:rPr>
+              <a:t>Baseline Climate Variables for Earth System Modelling</a:t>
+            </a:r>
+          </a:p>
+          <a:p>
+            <a:pPr marL="152400" indent="-152400" algn="l" rtl="0">
+              <a:lnSpc>
+                <a:spcPct val="102000"/>
+              </a:lnSpc>
+              <a:spcBef>
+                <a:spcPts val="0"/>
+              </a:spcBef>
+              <a:spcAft>
+                <a:spcPts val="280"/>
+              </a:spcAft>
+              <a:buClr>
+                <a:srgbClr val="4472C4"/>
+              </a:buClr>
+              <a:buFont typeface="Arial"/>
+              <a:buChar char="•"/>
+            </a:pPr>
+            <a:r>
+              <a:rPr lang="en-GB" sz="1050" b="0" i="0">
+                <a:solidFill>
+                  <a:srgbClr val="000000"/>
+                </a:solidFill>
+                <a:latin typeface="Roboto"/>
+                <a:ea typeface="Roboto"/>
+                <a:cs typeface="Roboto"/>
+                <a:sym typeface="Roboto"/>
+              </a:rPr>
+              <a:t>Benchmarking and Attributing Changes to Global Carbon and other Biogeochemical Cycles</a:t>
+            </a:r>
+          </a:p>
+          <a:p>
+            <a:pPr marL="152400" indent="-152400" algn="l" rtl="0">
+              <a:lnSpc>
+                <a:spcPct val="102000"/>
+              </a:lnSpc>
+              <a:spcBef>
+                <a:spcPts val="0"/>
+              </a:spcBef>
+              <a:spcAft>
+                <a:spcPts val="280"/>
+              </a:spcAft>
+              <a:buClr>
+                <a:srgbClr val="4472C4"/>
+              </a:buClr>
+              <a:buFont typeface="Arial"/>
+              <a:buChar char="•"/>
+            </a:pPr>
+            <a:r>
+              <a:rPr lang="en-GB" sz="1050" b="0" i="0">
+                <a:solidFill>
+                  <a:srgbClr val="000000"/>
+                </a:solidFill>
+                <a:latin typeface="Roboto"/>
+                <a:ea typeface="Roboto"/>
+                <a:cs typeface="Roboto"/>
+                <a:sym typeface="Roboto"/>
+              </a:rPr>
+              <a:t>Changes in marine biogeochemical cycles and ecosystem processes</a:t>
+            </a:r>
+          </a:p>
+          <a:p>
+            <a:pPr marL="152400" indent="-152400" algn="l" rtl="0">
+              <a:lnSpc>
+                <a:spcPct val="102000"/>
+              </a:lnSpc>
+              <a:spcBef>
+                <a:spcPts val="0"/>
+              </a:spcBef>
+              <a:spcAft>
+                <a:spcPts val="280"/>
+              </a:spcAft>
+              <a:buClr>
+                <a:srgbClr val="4472C4"/>
+              </a:buClr>
+              <a:buFont typeface="Arial"/>
+              <a:buChar char="•"/>
+            </a:pPr>
+            <a:r>
+              <a:rPr lang="en-GB" sz="1050" b="0" i="0">
+                <a:solidFill>
+                  <a:srgbClr val="000000"/>
+                </a:solidFill>
+                <a:latin typeface="Roboto"/>
+                <a:ea typeface="Roboto"/>
+                <a:cs typeface="Roboto"/>
+                <a:sym typeface="Roboto"/>
+              </a:rPr>
+              <a:t>Constructing a Global Carbon Budget</a:t>
+            </a:r>
+          </a:p>
+          <a:p>
+            <a:pPr marL="152400" indent="-152400" algn="l" rtl="0">
+              <a:lnSpc>
+                <a:spcPct val="102000"/>
+              </a:lnSpc>
+              <a:spcBef>
+                <a:spcPts val="0"/>
+              </a:spcBef>
+              <a:spcAft>
+                <a:spcPts val="280"/>
+              </a:spcAft>
+              <a:buClr>
+                <a:srgbClr val="4472C4"/>
+              </a:buClr>
+              <a:buFont typeface="Arial"/>
+              <a:buChar char="•"/>
+            </a:pPr>
+            <a:r>
+              <a:rPr lang="en-GB" sz="1050" b="0" i="0">
+                <a:solidFill>
+                  <a:srgbClr val="000000"/>
+                </a:solidFill>
+                <a:latin typeface="Roboto"/>
+                <a:ea typeface="Roboto"/>
+                <a:cs typeface="Roboto"/>
+                <a:sym typeface="Roboto"/>
+              </a:rPr>
+              <a:t>Earth's Energy Budget</a:t>
+            </a:r>
+          </a:p>
+          <a:p>
+            <a:pPr marL="152400" indent="-152400" algn="l" rtl="0">
+              <a:lnSpc>
+                <a:spcPct val="102000"/>
+              </a:lnSpc>
+              <a:spcBef>
+                <a:spcPts val="0"/>
+              </a:spcBef>
+              <a:spcAft>
+                <a:spcPts val="280"/>
+              </a:spcAft>
+              <a:buClr>
+                <a:srgbClr val="4472C4"/>
+              </a:buClr>
+              <a:buFont typeface="Arial"/>
+              <a:buChar char="•"/>
+            </a:pPr>
+            <a:r>
+              <a:rPr lang="en-GB" sz="1050" b="0" i="0">
+                <a:solidFill>
+                  <a:srgbClr val="000000"/>
+                </a:solidFill>
+                <a:latin typeface="Roboto"/>
+                <a:ea typeface="Roboto"/>
+                <a:cs typeface="Roboto"/>
+                <a:sym typeface="Roboto"/>
+              </a:rPr>
+              <a:t>Ocean changes, drivers and impacts</a:t>
+            </a:r>
+          </a:p>
+          <a:p>
+            <a:pPr marL="152400" indent="-152400" algn="l" rtl="0">
+              <a:lnSpc>
+                <a:spcPct val="102000"/>
+              </a:lnSpc>
+              <a:spcBef>
+                <a:spcPts val="0"/>
+              </a:spcBef>
+              <a:spcAft>
+                <a:spcPts val="280"/>
+              </a:spcAft>
+              <a:buClr>
+                <a:srgbClr val="4472C4"/>
+              </a:buClr>
+              <a:buFont typeface="Arial"/>
+              <a:buChar char="•"/>
+            </a:pPr>
+            <a:r>
+              <a:rPr lang="en-GB" sz="1050" b="0" i="0">
+                <a:solidFill>
+                  <a:srgbClr val="000000"/>
+                </a:solidFill>
+                <a:latin typeface="Roboto"/>
+                <a:ea typeface="Roboto"/>
+                <a:cs typeface="Roboto"/>
+                <a:sym typeface="Roboto"/>
+              </a:rPr>
+              <a:t>Role of fire in the Earth system</a:t>
+            </a:r>
+          </a:p>
+          <a:p>
+            <a:pPr marL="152400" indent="-152400" algn="l" rtl="0">
+              <a:lnSpc>
+                <a:spcPct val="102000"/>
+              </a:lnSpc>
+              <a:spcBef>
+                <a:spcPts val="0"/>
+              </a:spcBef>
+              <a:spcAft>
+                <a:spcPts val="280"/>
+              </a:spcAft>
+              <a:buClr>
+                <a:srgbClr val="4472C4"/>
+              </a:buClr>
+              <a:buFont typeface="Arial"/>
+              <a:buChar char="•"/>
+            </a:pPr>
+            <a:r>
+              <a:rPr lang="en-GB" sz="1050" b="0" i="0">
+                <a:solidFill>
+                  <a:srgbClr val="000000"/>
+                </a:solidFill>
+                <a:latin typeface="Roboto"/>
+                <a:ea typeface="Roboto"/>
+                <a:cs typeface="Roboto"/>
+                <a:sym typeface="Roboto"/>
+              </a:rPr>
+              <a:t>Sea ice changes, drivers and impacts</a:t>
+            </a:r>
+          </a:p>
+          <a:p>
+            <a:pPr marL="152400" indent="-152400" algn="l" rtl="0">
+              <a:lnSpc>
+                <a:spcPct val="102000"/>
+              </a:lnSpc>
+              <a:spcBef>
+                <a:spcPts val="0"/>
+              </a:spcBef>
+              <a:spcAft>
+                <a:spcPts val="280"/>
+              </a:spcAft>
+              <a:buClr>
+                <a:srgbClr val="4472C4"/>
+              </a:buClr>
+              <a:buFont typeface="Arial"/>
+              <a:buChar char="•"/>
+            </a:pPr>
+            <a:r>
+              <a:rPr lang="en-GB" sz="1050" b="0" i="0">
+                <a:solidFill>
+                  <a:srgbClr val="000000"/>
+                </a:solidFill>
+                <a:latin typeface="Roboto"/>
+                <a:ea typeface="Roboto"/>
+                <a:cs typeface="Roboto"/>
+                <a:sym typeface="Roboto"/>
+              </a:rPr>
+              <a:t>Terrestrial Biodiversity</a:t>
+            </a:r>
+          </a:p>
+          <a:p>
+            <a:pPr marL="152400" indent="-152400" algn="l" rtl="0">
+              <a:lnSpc>
+                <a:spcPct val="102000"/>
+              </a:lnSpc>
+              <a:spcBef>
+                <a:spcPts val="0"/>
+              </a:spcBef>
+              <a:spcAft>
+                <a:spcPts val="280"/>
+              </a:spcAft>
+              <a:buClr>
+                <a:srgbClr val="A5A5A5"/>
+              </a:buClr>
+              <a:buFont typeface="Arial"/>
+              <a:buChar char="•"/>
+            </a:pPr>
+            <a:r>
+              <a:rPr lang="en-GB" sz="1050" b="0" i="0">
+                <a:solidFill>
+                  <a:srgbClr val="595959"/>
+                </a:solidFill>
+                <a:latin typeface="Roboto"/>
+                <a:ea typeface="Roboto"/>
+                <a:cs typeface="Roboto"/>
+                <a:sym typeface="Roboto"/>
+              </a:rPr>
+              <a:t>Accurate assessment of land-atmosphere coupling</a:t>
+            </a:r>
+          </a:p>
+          <a:p>
+            <a:pPr marL="152400" indent="-152400" algn="l" rtl="0">
+              <a:lnSpc>
+                <a:spcPct val="102000"/>
+              </a:lnSpc>
+              <a:spcBef>
+                <a:spcPts val="0"/>
+              </a:spcBef>
+              <a:spcAft>
+                <a:spcPts val="280"/>
+              </a:spcAft>
+              <a:buClr>
+                <a:srgbClr val="A5A5A5"/>
+              </a:buClr>
+              <a:buFont typeface="Arial"/>
+              <a:buChar char="•"/>
+            </a:pPr>
+            <a:r>
+              <a:rPr lang="en-GB" sz="1050" b="0" i="0">
+                <a:solidFill>
+                  <a:srgbClr val="595959"/>
+                </a:solidFill>
+                <a:latin typeface="Roboto"/>
+                <a:ea typeface="Roboto"/>
+                <a:cs typeface="Roboto"/>
+                <a:sym typeface="Roboto"/>
+              </a:rPr>
+              <a:t>Climate impacts on marine biodiversity and ecosystems</a:t>
+            </a:r>
+          </a:p>
+          <a:p>
+            <a:pPr marL="152400" indent="-152400" algn="l" rtl="0">
+              <a:lnSpc>
+                <a:spcPct val="102000"/>
+              </a:lnSpc>
+              <a:spcBef>
+                <a:spcPts val="0"/>
+              </a:spcBef>
+              <a:spcAft>
+                <a:spcPts val="280"/>
+              </a:spcAft>
+              <a:buClr>
+                <a:srgbClr val="A5A5A5"/>
+              </a:buClr>
+              <a:buFont typeface="Arial"/>
+              <a:buChar char="•"/>
+            </a:pPr>
+            <a:r>
+              <a:rPr lang="en-GB" sz="1050" b="0" i="0">
+                <a:solidFill>
+                  <a:srgbClr val="595959"/>
+                </a:solidFill>
+                <a:latin typeface="Roboto"/>
+                <a:ea typeface="Roboto"/>
+                <a:cs typeface="Roboto"/>
+                <a:sym typeface="Roboto"/>
+              </a:rPr>
+              <a:t>Ocean Extremes</a:t>
+            </a:r>
+          </a:p>
+        </p:txBody>
+      </p:sp>
+      <p:sp>
+        <p:nvSpPr>
+          <p:cNvPr id="907" name="tb908"/>
+          <p:cNvSpPr txBox="1"/>
+          <p:nvPr/>
+        </p:nvSpPr>
+        <p:spPr>
+          <a:xfrm>
+            <a:off x="4398264" y="1810512"/>
+            <a:ext cx="3392424" cy="3154680"/>
+          </a:xfrm>
+          <a:prstGeom prst="rect">
+            <a:avLst/>
+          </a:prstGeom>
+          <a:noFill/>
+          <a:ln>
+            <a:noFill/>
+          </a:ln>
+        </p:spPr>
+        <p:txBody>
+          <a:bodyPr spcFirstLastPara="1" wrap="square" lIns="0" tIns="0" rIns="0" bIns="0" anchor="t" anchorCtr="0">
+            <a:noAutofit/>
+          </a:bodyPr>
+          <a:lstStyle/>
+          <a:p>
+            <a:pPr marL="0" indent="0" algn="l" rtl="0">
+              <a:lnSpc>
+                <a:spcPct val="100000"/>
+              </a:lnSpc>
+              <a:spcBef>
+                <a:spcPts val="0"/>
+              </a:spcBef>
+              <a:spcAft>
+                <a:spcPts val="300"/>
+              </a:spcAft>
+              <a:buNone/>
+            </a:pPr>
+            <a:r>
+              <a:rPr lang="en-GB" sz="1250" b="1" i="0">
+                <a:solidFill>
+                  <a:srgbClr val="1F3864"/>
+                </a:solidFill>
+                <a:latin typeface="Montserrat"/>
+                <a:ea typeface="Montserrat"/>
+                <a:cs typeface="Montserrat"/>
+                <a:sym typeface="Montserrat"/>
+              </a:rPr>
+              <a:t>ESYDA + ICR  (4)</a:t>
+            </a:r>
+          </a:p>
+          <a:p>
+            <a:pPr marL="152400" indent="-152400" algn="l" rtl="0">
+              <a:lnSpc>
+                <a:spcPct val="102000"/>
+              </a:lnSpc>
+              <a:spcBef>
+                <a:spcPts val="0"/>
+              </a:spcBef>
+              <a:spcAft>
+                <a:spcPts val="280"/>
+              </a:spcAft>
+              <a:buClr>
+                <a:srgbClr val="4472C4"/>
+              </a:buClr>
+              <a:buFont typeface="Arial"/>
+              <a:buChar char="•"/>
+            </a:pPr>
+            <a:r>
+              <a:rPr lang="en-GB" sz="1050" b="0" i="0">
+                <a:solidFill>
+                  <a:srgbClr val="000000"/>
+                </a:solidFill>
+                <a:latin typeface="Roboto"/>
+                <a:ea typeface="Roboto"/>
+                <a:cs typeface="Roboto"/>
+                <a:sym typeface="Roboto"/>
+              </a:rPr>
+              <a:t>Assessments for Hydrological Processes, Water Resources, and Freshwater Systems</a:t>
+            </a:r>
+          </a:p>
+          <a:p>
+            <a:pPr marL="152400" indent="-152400" algn="l" rtl="0">
+              <a:lnSpc>
+                <a:spcPct val="102000"/>
+              </a:lnSpc>
+              <a:spcBef>
+                <a:spcPts val="0"/>
+              </a:spcBef>
+              <a:spcAft>
+                <a:spcPts val="280"/>
+              </a:spcAft>
+              <a:buClr>
+                <a:srgbClr val="4472C4"/>
+              </a:buClr>
+              <a:buFont typeface="Arial"/>
+              <a:buChar char="•"/>
+            </a:pPr>
+            <a:r>
+              <a:rPr lang="en-GB" sz="1050" b="0" i="0">
+                <a:solidFill>
+                  <a:srgbClr val="000000"/>
+                </a:solidFill>
+                <a:latin typeface="Roboto"/>
+                <a:ea typeface="Roboto"/>
+                <a:cs typeface="Roboto"/>
+                <a:sym typeface="Roboto"/>
+              </a:rPr>
+              <a:t>Land use change</a:t>
+            </a:r>
+          </a:p>
+          <a:p>
+            <a:pPr marL="152400" indent="-152400" algn="l" rtl="0">
+              <a:lnSpc>
+                <a:spcPct val="102000"/>
+              </a:lnSpc>
+              <a:spcBef>
+                <a:spcPts val="0"/>
+              </a:spcBef>
+              <a:spcAft>
+                <a:spcPts val="280"/>
+              </a:spcAft>
+              <a:buClr>
+                <a:srgbClr val="4472C4"/>
+              </a:buClr>
+              <a:buFont typeface="Arial"/>
+              <a:buChar char="•"/>
+            </a:pPr>
+            <a:r>
+              <a:rPr lang="en-GB" sz="1050" b="0" i="0">
+                <a:solidFill>
+                  <a:srgbClr val="000000"/>
+                </a:solidFill>
+                <a:latin typeface="Roboto"/>
+                <a:ea typeface="Roboto"/>
+                <a:cs typeface="Roboto"/>
+                <a:sym typeface="Roboto"/>
+              </a:rPr>
+              <a:t>Plant Phenology</a:t>
+            </a:r>
+          </a:p>
+          <a:p>
+            <a:pPr marL="152400" indent="-152400" algn="l" rtl="0">
+              <a:lnSpc>
+                <a:spcPct val="102000"/>
+              </a:lnSpc>
+              <a:spcBef>
+                <a:spcPts val="0"/>
+              </a:spcBef>
+              <a:spcAft>
+                <a:spcPts val="280"/>
+              </a:spcAft>
+              <a:buClr>
+                <a:srgbClr val="4472C4"/>
+              </a:buClr>
+              <a:buFont typeface="Arial"/>
+              <a:buChar char="•"/>
+            </a:pPr>
+            <a:r>
+              <a:rPr lang="en-GB" sz="1050" b="0" i="0">
+                <a:solidFill>
+                  <a:srgbClr val="000000"/>
+                </a:solidFill>
+                <a:latin typeface="Roboto"/>
+                <a:ea typeface="Roboto"/>
+                <a:cs typeface="Roboto"/>
+                <a:sym typeface="Roboto"/>
+              </a:rPr>
+              <a:t>Water cycle/budget assessment</a:t>
+            </a:r>
+          </a:p>
+          <a:p>
+            <a:pPr marL="0" indent="0" algn="l" rtl="0">
+              <a:lnSpc>
+                <a:spcPct val="100000"/>
+              </a:lnSpc>
+              <a:spcBef>
+                <a:spcPts val="0"/>
+              </a:spcBef>
+              <a:spcAft>
+                <a:spcPts val="0"/>
+              </a:spcAft>
+              <a:buNone/>
+            </a:pPr>
+            <a:r>
+              <a:rPr lang="en-GB" sz="700" b="0" i="0">
+                <a:solidFill>
+                  <a:srgbClr val="000000"/>
+                </a:solidFill>
+                <a:latin typeface="Roboto"/>
+                <a:ea typeface="Roboto"/>
+                <a:cs typeface="Roboto"/>
+                <a:sym typeface="Roboto"/>
+              </a:rPr>
+              <a:t> </a:t>
+            </a:r>
+          </a:p>
+          <a:p>
+            <a:pPr marL="0" indent="0" algn="l" rtl="0">
+              <a:lnSpc>
+                <a:spcPct val="100000"/>
+              </a:lnSpc>
+              <a:spcBef>
+                <a:spcPts val="0"/>
+              </a:spcBef>
+              <a:spcAft>
+                <a:spcPts val="300"/>
+              </a:spcAft>
+              <a:buNone/>
+            </a:pPr>
+            <a:r>
+              <a:rPr lang="en-GB" sz="1250" b="1" i="0">
+                <a:solidFill>
+                  <a:srgbClr val="1F3864"/>
+                </a:solidFill>
+                <a:latin typeface="Montserrat"/>
+                <a:ea typeface="Montserrat"/>
+                <a:cs typeface="Montserrat"/>
+                <a:sym typeface="Montserrat"/>
+              </a:rPr>
+              <a:t>CLIVAP  (6)</a:t>
+            </a:r>
+          </a:p>
+          <a:p>
+            <a:pPr marL="152400" indent="-152400" algn="l" rtl="0">
+              <a:lnSpc>
+                <a:spcPct val="102000"/>
+              </a:lnSpc>
+              <a:spcBef>
+                <a:spcPts val="0"/>
+              </a:spcBef>
+              <a:spcAft>
+                <a:spcPts val="280"/>
+              </a:spcAft>
+              <a:buClr>
+                <a:srgbClr val="4472C4"/>
+              </a:buClr>
+              <a:buFont typeface="Arial"/>
+              <a:buChar char="•"/>
+            </a:pPr>
+            <a:r>
+              <a:rPr lang="en-GB" sz="1050" b="0" i="0">
+                <a:solidFill>
+                  <a:srgbClr val="000000"/>
+                </a:solidFill>
+                <a:latin typeface="Roboto"/>
+                <a:ea typeface="Roboto"/>
+                <a:cs typeface="Roboto"/>
+                <a:sym typeface="Roboto"/>
+              </a:rPr>
+              <a:t>Atmospheric dynamics and variability</a:t>
+            </a:r>
+          </a:p>
+          <a:p>
+            <a:pPr marL="152400" indent="-152400" algn="l" rtl="0">
+              <a:lnSpc>
+                <a:spcPct val="102000"/>
+              </a:lnSpc>
+              <a:spcBef>
+                <a:spcPts val="0"/>
+              </a:spcBef>
+              <a:spcAft>
+                <a:spcPts val="280"/>
+              </a:spcAft>
+              <a:buClr>
+                <a:srgbClr val="4472C4"/>
+              </a:buClr>
+              <a:buFont typeface="Arial"/>
+              <a:buChar char="•"/>
+            </a:pPr>
+            <a:r>
+              <a:rPr lang="en-GB" sz="1050" b="0" i="0">
+                <a:solidFill>
+                  <a:srgbClr val="000000"/>
+                </a:solidFill>
+                <a:latin typeface="Roboto"/>
+                <a:ea typeface="Roboto"/>
+                <a:cs typeface="Roboto"/>
+                <a:sym typeface="Roboto"/>
+              </a:rPr>
+              <a:t>Detection and Attribution</a:t>
+            </a:r>
+          </a:p>
+          <a:p>
+            <a:pPr marL="152400" indent="-152400" algn="l" rtl="0">
+              <a:lnSpc>
+                <a:spcPct val="102000"/>
+              </a:lnSpc>
+              <a:spcBef>
+                <a:spcPts val="0"/>
+              </a:spcBef>
+              <a:spcAft>
+                <a:spcPts val="280"/>
+              </a:spcAft>
+              <a:buClr>
+                <a:srgbClr val="4472C4"/>
+              </a:buClr>
+              <a:buFont typeface="Arial"/>
+              <a:buChar char="•"/>
+            </a:pPr>
+            <a:r>
+              <a:rPr lang="en-GB" sz="1050" b="0" i="0">
+                <a:solidFill>
+                  <a:srgbClr val="000000"/>
+                </a:solidFill>
+                <a:latin typeface="Roboto"/>
+                <a:ea typeface="Roboto"/>
+                <a:cs typeface="Roboto"/>
+                <a:sym typeface="Roboto"/>
+              </a:rPr>
+              <a:t>Diagnosing temperature variability and extremes</a:t>
+            </a:r>
+          </a:p>
+          <a:p>
+            <a:pPr marL="152400" indent="-152400" algn="l" rtl="0">
+              <a:lnSpc>
+                <a:spcPct val="102000"/>
+              </a:lnSpc>
+              <a:spcBef>
+                <a:spcPts val="0"/>
+              </a:spcBef>
+              <a:spcAft>
+                <a:spcPts val="280"/>
+              </a:spcAft>
+              <a:buClr>
+                <a:srgbClr val="4472C4"/>
+              </a:buClr>
+              <a:buFont typeface="Arial"/>
+              <a:buChar char="•"/>
+            </a:pPr>
+            <a:r>
+              <a:rPr lang="en-GB" sz="1050" b="0" i="0">
+                <a:solidFill>
+                  <a:srgbClr val="000000"/>
+                </a:solidFill>
+                <a:latin typeface="Roboto"/>
+                <a:ea typeface="Roboto"/>
+                <a:cs typeface="Roboto"/>
+                <a:sym typeface="Roboto"/>
+              </a:rPr>
+              <a:t>Dynamical Downscaling (CORDEX)</a:t>
+            </a:r>
+          </a:p>
+          <a:p>
+            <a:pPr marL="152400" indent="-152400" algn="l" rtl="0">
+              <a:lnSpc>
+                <a:spcPct val="102000"/>
+              </a:lnSpc>
+              <a:spcBef>
+                <a:spcPts val="0"/>
+              </a:spcBef>
+              <a:spcAft>
+                <a:spcPts val="280"/>
+              </a:spcAft>
+              <a:buClr>
+                <a:srgbClr val="4472C4"/>
+              </a:buClr>
+              <a:buFont typeface="Arial"/>
+              <a:buChar char="•"/>
+            </a:pPr>
+            <a:r>
+              <a:rPr lang="en-GB" sz="1050" b="0" i="0">
+                <a:solidFill>
+                  <a:srgbClr val="000000"/>
+                </a:solidFill>
+                <a:latin typeface="Roboto"/>
+                <a:ea typeface="Roboto"/>
+                <a:cs typeface="Roboto"/>
+                <a:sym typeface="Roboto"/>
+              </a:rPr>
+              <a:t>Multi-annual-to-decadal predictability of the Earth System and risk assessment of climate extremes</a:t>
+            </a:r>
+          </a:p>
+          <a:p>
+            <a:pPr marL="152400" indent="-152400" algn="l" rtl="0">
+              <a:lnSpc>
+                <a:spcPct val="102000"/>
+              </a:lnSpc>
+              <a:spcBef>
+                <a:spcPts val="0"/>
+              </a:spcBef>
+              <a:spcAft>
+                <a:spcPts val="280"/>
+              </a:spcAft>
+              <a:buClr>
+                <a:srgbClr val="A5A5A5"/>
+              </a:buClr>
+              <a:buFont typeface="Arial"/>
+              <a:buChar char="•"/>
+            </a:pPr>
+            <a:r>
+              <a:rPr lang="en-GB" sz="1050" b="0" i="0">
+                <a:solidFill>
+                  <a:srgbClr val="595959"/>
+                </a:solidFill>
+                <a:latin typeface="Roboto"/>
+                <a:ea typeface="Roboto"/>
+                <a:cs typeface="Roboto"/>
+                <a:sym typeface="Roboto"/>
+              </a:rPr>
+              <a:t>Robust Risk Assessment of Tipping Points</a:t>
+            </a:r>
+          </a:p>
+        </p:txBody>
+      </p:sp>
+      <p:sp>
+        <p:nvSpPr>
+          <p:cNvPr id="909" name="tb910"/>
+          <p:cNvSpPr txBox="1"/>
+          <p:nvPr/>
+        </p:nvSpPr>
+        <p:spPr>
+          <a:xfrm>
+            <a:off x="8019288" y="1810512"/>
+            <a:ext cx="3392424" cy="3154680"/>
+          </a:xfrm>
+          <a:prstGeom prst="rect">
+            <a:avLst/>
+          </a:prstGeom>
+          <a:noFill/>
+          <a:ln>
+            <a:noFill/>
+          </a:ln>
+        </p:spPr>
+        <p:txBody>
+          <a:bodyPr spcFirstLastPara="1" wrap="square" lIns="0" tIns="0" rIns="0" bIns="0" anchor="t" anchorCtr="0">
+            <a:noAutofit/>
+          </a:bodyPr>
+          <a:lstStyle/>
+          <a:p>
+            <a:pPr marL="0" indent="0" algn="l" rtl="0">
+              <a:lnSpc>
+                <a:spcPct val="100000"/>
+              </a:lnSpc>
+              <a:spcBef>
+                <a:spcPts val="0"/>
+              </a:spcBef>
+              <a:spcAft>
+                <a:spcPts val="300"/>
+              </a:spcAft>
+              <a:buNone/>
+            </a:pPr>
+            <a:r>
+              <a:rPr lang="en-GB" sz="1250" b="1" i="0">
+                <a:solidFill>
+                  <a:srgbClr val="1F3864"/>
+                </a:solidFill>
+                <a:latin typeface="Montserrat"/>
+                <a:ea typeface="Montserrat"/>
+                <a:cs typeface="Montserrat"/>
+                <a:sym typeface="Montserrat"/>
+              </a:rPr>
+              <a:t>ICR  (6)</a:t>
+            </a:r>
+          </a:p>
+          <a:p>
+            <a:pPr marL="152400" indent="-152400" algn="l" rtl="0">
+              <a:lnSpc>
+                <a:spcPct val="102000"/>
+              </a:lnSpc>
+              <a:spcBef>
+                <a:spcPts val="0"/>
+              </a:spcBef>
+              <a:spcAft>
+                <a:spcPts val="280"/>
+              </a:spcAft>
+              <a:buClr>
+                <a:srgbClr val="4472C4"/>
+              </a:buClr>
+              <a:buFont typeface="Arial"/>
+              <a:buChar char="•"/>
+            </a:pPr>
+            <a:r>
+              <a:rPr lang="en-GB" sz="1050" b="0" i="0">
+                <a:solidFill>
+                  <a:srgbClr val="000000"/>
+                </a:solidFill>
+                <a:latin typeface="Roboto"/>
+                <a:ea typeface="Roboto"/>
+                <a:cs typeface="Roboto"/>
+                <a:sym typeface="Roboto"/>
+              </a:rPr>
+              <a:t>Agriculture and Food System Impacts</a:t>
+            </a:r>
+          </a:p>
+          <a:p>
+            <a:pPr marL="152400" indent="-152400" algn="l" rtl="0">
+              <a:lnSpc>
+                <a:spcPct val="102000"/>
+              </a:lnSpc>
+              <a:spcBef>
+                <a:spcPts val="0"/>
+              </a:spcBef>
+              <a:spcAft>
+                <a:spcPts val="280"/>
+              </a:spcAft>
+              <a:buClr>
+                <a:srgbClr val="4472C4"/>
+              </a:buClr>
+              <a:buFont typeface="Arial"/>
+              <a:buChar char="•"/>
+            </a:pPr>
+            <a:r>
+              <a:rPr lang="en-GB" sz="1050" b="0" i="0">
+                <a:solidFill>
+                  <a:srgbClr val="000000"/>
+                </a:solidFill>
+                <a:latin typeface="Roboto"/>
+                <a:ea typeface="Roboto"/>
+                <a:cs typeface="Roboto"/>
+                <a:sym typeface="Roboto"/>
+              </a:rPr>
+              <a:t>Vulnerability of urban systems, infrastructure and populations</a:t>
+            </a:r>
+          </a:p>
+          <a:p>
+            <a:pPr marL="152400" indent="-152400" algn="l" rtl="0">
+              <a:lnSpc>
+                <a:spcPct val="102000"/>
+              </a:lnSpc>
+              <a:spcBef>
+                <a:spcPts val="0"/>
+              </a:spcBef>
+              <a:spcAft>
+                <a:spcPts val="280"/>
+              </a:spcAft>
+              <a:buClr>
+                <a:srgbClr val="4472C4"/>
+              </a:buClr>
+              <a:buFont typeface="Arial"/>
+              <a:buChar char="•"/>
+            </a:pPr>
+            <a:r>
+              <a:rPr lang="en-GB" sz="1050" b="0" i="0">
+                <a:solidFill>
+                  <a:srgbClr val="000000"/>
+                </a:solidFill>
+                <a:latin typeface="Roboto"/>
+                <a:ea typeface="Roboto"/>
+                <a:cs typeface="Roboto"/>
+                <a:sym typeface="Roboto"/>
+              </a:rPr>
+              <a:t>Water Security and Freshwater Ecosystem Services</a:t>
+            </a:r>
+          </a:p>
+          <a:p>
+            <a:pPr marL="152400" indent="-152400" algn="l" rtl="0">
+              <a:lnSpc>
+                <a:spcPct val="102000"/>
+              </a:lnSpc>
+              <a:spcBef>
+                <a:spcPts val="0"/>
+              </a:spcBef>
+              <a:spcAft>
+                <a:spcPts val="280"/>
+              </a:spcAft>
+              <a:buClr>
+                <a:srgbClr val="A5A5A5"/>
+              </a:buClr>
+              <a:buFont typeface="Arial"/>
+              <a:buChar char="•"/>
+            </a:pPr>
+            <a:r>
+              <a:rPr lang="en-GB" sz="1050" b="0" i="0">
+                <a:solidFill>
+                  <a:srgbClr val="595959"/>
+                </a:solidFill>
+                <a:latin typeface="Roboto"/>
+                <a:ea typeface="Roboto"/>
+                <a:cs typeface="Roboto"/>
+                <a:sym typeface="Roboto"/>
+              </a:rPr>
+              <a:t>Bias-adjustment for impacts modeling and analysis</a:t>
+            </a:r>
+          </a:p>
+          <a:p>
+            <a:pPr marL="152400" indent="-152400" algn="l" rtl="0">
+              <a:lnSpc>
+                <a:spcPct val="102000"/>
+              </a:lnSpc>
+              <a:spcBef>
+                <a:spcPts val="0"/>
+              </a:spcBef>
+              <a:spcAft>
+                <a:spcPts val="280"/>
+              </a:spcAft>
+              <a:buClr>
+                <a:srgbClr val="A5A5A5"/>
+              </a:buClr>
+              <a:buFont typeface="Arial"/>
+              <a:buChar char="•"/>
+            </a:pPr>
+            <a:r>
+              <a:rPr lang="en-GB" sz="1050" b="0" i="0">
+                <a:solidFill>
+                  <a:srgbClr val="595959"/>
+                </a:solidFill>
+                <a:latin typeface="Roboto"/>
+                <a:ea typeface="Roboto"/>
+                <a:cs typeface="Roboto"/>
+                <a:sym typeface="Roboto"/>
+              </a:rPr>
+              <a:t>Impacts of climate change on aviation</a:t>
+            </a:r>
+          </a:p>
+          <a:p>
+            <a:pPr marL="152400" indent="-152400" algn="l" rtl="0">
+              <a:lnSpc>
+                <a:spcPct val="102000"/>
+              </a:lnSpc>
+              <a:spcBef>
+                <a:spcPts val="0"/>
+              </a:spcBef>
+              <a:spcAft>
+                <a:spcPts val="280"/>
+              </a:spcAft>
+              <a:buClr>
+                <a:srgbClr val="A5A5A5"/>
+              </a:buClr>
+              <a:buFont typeface="Arial"/>
+              <a:buChar char="•"/>
+            </a:pPr>
+            <a:r>
+              <a:rPr lang="en-GB" sz="1050" b="0" i="0">
+                <a:solidFill>
+                  <a:srgbClr val="595959"/>
+                </a:solidFill>
+                <a:latin typeface="Roboto"/>
+                <a:ea typeface="Roboto"/>
+                <a:cs typeface="Roboto"/>
+                <a:sym typeface="Roboto"/>
+              </a:rPr>
+              <a:t>Impacts of climate change on transport infrastructure</a:t>
+            </a:r>
+          </a:p>
+          <a:p>
+            <a:pPr marL="0" indent="0" algn="l" rtl="0">
+              <a:lnSpc>
+                <a:spcPct val="100000"/>
+              </a:lnSpc>
+              <a:spcBef>
+                <a:spcPts val="0"/>
+              </a:spcBef>
+              <a:spcAft>
+                <a:spcPts val="0"/>
+              </a:spcAft>
+              <a:buNone/>
+            </a:pPr>
+            <a:r>
+              <a:rPr lang="en-GB" sz="700" b="0" i="0">
+                <a:solidFill>
+                  <a:srgbClr val="000000"/>
+                </a:solidFill>
+                <a:latin typeface="Roboto"/>
+                <a:ea typeface="Roboto"/>
+                <a:cs typeface="Roboto"/>
+                <a:sym typeface="Roboto"/>
+              </a:rPr>
+              <a:t> </a:t>
+            </a:r>
+          </a:p>
+          <a:p>
+            <a:pPr marL="0" indent="0" algn="l" rtl="0">
+              <a:lnSpc>
+                <a:spcPct val="100000"/>
+              </a:lnSpc>
+              <a:spcBef>
+                <a:spcPts val="0"/>
+              </a:spcBef>
+              <a:spcAft>
+                <a:spcPts val="300"/>
+              </a:spcAft>
+              <a:buNone/>
+            </a:pPr>
+            <a:r>
+              <a:rPr lang="en-GB" sz="1250" b="1" i="0">
+                <a:solidFill>
+                  <a:srgbClr val="1F3864"/>
+                </a:solidFill>
+                <a:latin typeface="Montserrat"/>
+                <a:ea typeface="Montserrat"/>
+                <a:cs typeface="Montserrat"/>
+                <a:sym typeface="Montserrat"/>
+              </a:rPr>
+              <a:t>EIEE  (2)</a:t>
+            </a:r>
+          </a:p>
+          <a:p>
+            <a:pPr marL="152400" indent="-152400" algn="l" rtl="0">
+              <a:lnSpc>
+                <a:spcPct val="102000"/>
+              </a:lnSpc>
+              <a:spcBef>
+                <a:spcPts val="0"/>
+              </a:spcBef>
+              <a:spcAft>
+                <a:spcPts val="280"/>
+              </a:spcAft>
+              <a:buClr>
+                <a:srgbClr val="A5A5A5"/>
+              </a:buClr>
+              <a:buFont typeface="Arial"/>
+              <a:buChar char="•"/>
+            </a:pPr>
+            <a:r>
+              <a:rPr lang="en-GB" sz="1050" b="0" i="0">
+                <a:solidFill>
+                  <a:srgbClr val="595959"/>
+                </a:solidFill>
+                <a:latin typeface="Roboto"/>
+                <a:ea typeface="Roboto"/>
+                <a:cs typeface="Roboto"/>
+                <a:sym typeface="Roboto"/>
+              </a:rPr>
+              <a:t>Energy System Impacts</a:t>
+            </a:r>
+          </a:p>
+          <a:p>
+            <a:pPr marL="152400" indent="-152400" algn="l" rtl="0">
+              <a:lnSpc>
+                <a:spcPct val="102000"/>
+              </a:lnSpc>
+              <a:spcBef>
+                <a:spcPts val="0"/>
+              </a:spcBef>
+              <a:spcAft>
+                <a:spcPts val="280"/>
+              </a:spcAft>
+              <a:buClr>
+                <a:srgbClr val="A5A5A5"/>
+              </a:buClr>
+              <a:buFont typeface="Arial"/>
+              <a:buChar char="•"/>
+            </a:pPr>
+            <a:r>
+              <a:rPr lang="en-GB" sz="1050" b="0" i="0">
+                <a:solidFill>
+                  <a:srgbClr val="595959"/>
+                </a:solidFill>
+                <a:latin typeface="Roboto"/>
+                <a:ea typeface="Roboto"/>
+                <a:cs typeface="Roboto"/>
+                <a:sym typeface="Roboto"/>
+              </a:rPr>
+              <a:t>Health Impacts</a:t>
+            </a:r>
+          </a:p>
+        </p:txBody>
+      </p:sp>
+      <p:sp>
+        <p:nvSpPr>
+          <p:cNvPr id="911" name="rc912"/>
+          <p:cNvSpPr/>
+          <p:nvPr/>
+        </p:nvSpPr>
+        <p:spPr>
+          <a:xfrm>
+            <a:off x="777240" y="5029200"/>
+            <a:ext cx="2505456" cy="841248"/>
+          </a:xfrm>
+          <a:prstGeom prst="roundRect">
+            <a:avLst>
+              <a:gd name="adj" fmla="val 8695"/>
+            </a:avLst>
+          </a:prstGeom>
+          <a:solidFill>
+            <a:srgbClr val="F1F4F9"/>
+          </a:solidFill>
+          <a:ln>
+            <a:noFill/>
+          </a:ln>
+        </p:spPr>
+        <p:txBody>
+          <a:bodyPr/>
+          <a:lstStyle/>
+          <a:p>
+            <a:pPr algn="l" rtl="0">
+              <a:buNone/>
+            </a:pPr>
+          </a:p>
+        </p:txBody>
+      </p:sp>
+      <p:sp>
+        <p:nvSpPr>
+          <p:cNvPr id="913" name="tb914"/>
+          <p:cNvSpPr txBox="1"/>
+          <p:nvPr/>
+        </p:nvSpPr>
+        <p:spPr>
+          <a:xfrm>
+            <a:off x="832103" y="5084064"/>
+            <a:ext cx="2395728" cy="768096"/>
+          </a:xfrm>
+          <a:prstGeom prst="rect">
+            <a:avLst/>
+          </a:prstGeom>
+          <a:noFill/>
+          <a:ln>
+            <a:noFill/>
+          </a:ln>
+        </p:spPr>
+        <p:txBody>
+          <a:bodyPr spcFirstLastPara="1" wrap="square" lIns="109728" tIns="109728" rIns="109728" bIns="109728" anchor="t" anchorCtr="0">
+            <a:noAutofit/>
+          </a:bodyPr>
+          <a:lstStyle/>
+          <a:p>
+            <a:pPr marL="0" indent="0" algn="l" rtl="0">
+              <a:lnSpc>
+                <a:spcPct val="100000"/>
+              </a:lnSpc>
+              <a:spcBef>
+                <a:spcPts val="0"/>
+              </a:spcBef>
+              <a:spcAft>
+                <a:spcPts val="180"/>
+              </a:spcAft>
+              <a:buNone/>
+            </a:pPr>
+            <a:r>
+              <a:rPr lang="en-GB" sz="1250" b="1" i="0">
+                <a:solidFill>
+                  <a:srgbClr val="1F3864"/>
+                </a:solidFill>
+                <a:latin typeface="Montserrat"/>
+                <a:ea typeface="Montserrat"/>
+                <a:cs typeface="Montserrat"/>
+                <a:sym typeface="Montserrat"/>
+              </a:rPr>
+              <a:t>ESYDA</a:t>
+            </a:r>
+          </a:p>
+          <a:p>
+            <a:pPr marL="0" indent="0" algn="l" rtl="0">
+              <a:lnSpc>
+                <a:spcPct val="100000"/>
+              </a:lnSpc>
+              <a:spcBef>
+                <a:spcPts val="0"/>
+              </a:spcBef>
+              <a:spcAft>
+                <a:spcPts val="60"/>
+              </a:spcAft>
+              <a:buNone/>
+            </a:pPr>
+            <a:r>
+              <a:rPr lang="en-GB" sz="950" b="0" i="0">
+                <a:solidFill>
+                  <a:srgbClr val="595959"/>
+                </a:solidFill>
+                <a:latin typeface="Roboto"/>
+                <a:ea typeface="Roboto"/>
+                <a:cs typeface="Roboto"/>
+                <a:sym typeface="Roboto"/>
+              </a:rPr>
+              <a:t>16 opportunities · 544 variables</a:t>
+            </a:r>
+          </a:p>
+          <a:p>
+            <a:pPr marL="0" indent="0" algn="l" rtl="0">
+              <a:lnSpc>
+                <a:spcPct val="100000"/>
+              </a:lnSpc>
+              <a:spcBef>
+                <a:spcPts val="0"/>
+              </a:spcBef>
+              <a:spcAft>
+                <a:spcPts val="0"/>
+              </a:spcAft>
+              <a:buNone/>
+            </a:pPr>
+            <a:r>
+              <a:rPr lang="en-GB" sz="950" b="0" i="0">
+                <a:solidFill>
+                  <a:srgbClr val="ED7D31"/>
+                </a:solidFill>
+                <a:latin typeface="Roboto"/>
+                <a:ea typeface="Roboto"/>
+                <a:cs typeface="Roboto"/>
+                <a:sym typeface="Roboto"/>
+              </a:rPr>
+              <a:t>232 new CMIP7 variables</a:t>
+            </a:r>
+          </a:p>
+        </p:txBody>
+      </p:sp>
+      <p:sp>
+        <p:nvSpPr>
+          <p:cNvPr id="915" name="rc916"/>
+          <p:cNvSpPr/>
+          <p:nvPr/>
+        </p:nvSpPr>
+        <p:spPr>
+          <a:xfrm>
+            <a:off x="3483864" y="5029200"/>
+            <a:ext cx="2505456" cy="841248"/>
+          </a:xfrm>
+          <a:prstGeom prst="roundRect">
+            <a:avLst>
+              <a:gd name="adj" fmla="val 8695"/>
+            </a:avLst>
+          </a:prstGeom>
+          <a:solidFill>
+            <a:srgbClr val="F1F4F9"/>
+          </a:solidFill>
+          <a:ln>
+            <a:noFill/>
+          </a:ln>
+        </p:spPr>
+        <p:txBody>
+          <a:bodyPr/>
+          <a:lstStyle/>
+          <a:p>
+            <a:pPr algn="l" rtl="0">
+              <a:buNone/>
+            </a:pPr>
+          </a:p>
+        </p:txBody>
+      </p:sp>
+      <p:sp>
+        <p:nvSpPr>
+          <p:cNvPr id="917" name="tb918"/>
+          <p:cNvSpPr txBox="1"/>
+          <p:nvPr/>
+        </p:nvSpPr>
+        <p:spPr>
+          <a:xfrm>
+            <a:off x="3538728" y="5084064"/>
+            <a:ext cx="2395728" cy="768096"/>
+          </a:xfrm>
+          <a:prstGeom prst="rect">
+            <a:avLst/>
+          </a:prstGeom>
+          <a:noFill/>
+          <a:ln>
+            <a:noFill/>
+          </a:ln>
+        </p:spPr>
+        <p:txBody>
+          <a:bodyPr spcFirstLastPara="1" wrap="square" lIns="109728" tIns="109728" rIns="109728" bIns="109728" anchor="t" anchorCtr="0">
+            <a:noAutofit/>
+          </a:bodyPr>
+          <a:lstStyle/>
+          <a:p>
+            <a:pPr marL="0" indent="0" algn="l" rtl="0">
+              <a:lnSpc>
+                <a:spcPct val="100000"/>
+              </a:lnSpc>
+              <a:spcBef>
+                <a:spcPts val="0"/>
+              </a:spcBef>
+              <a:spcAft>
+                <a:spcPts val="180"/>
+              </a:spcAft>
+              <a:buNone/>
+            </a:pPr>
+            <a:r>
+              <a:rPr lang="en-GB" sz="1250" b="1" i="0">
+                <a:solidFill>
+                  <a:srgbClr val="1F3864"/>
+                </a:solidFill>
+                <a:latin typeface="Montserrat"/>
+                <a:ea typeface="Montserrat"/>
+                <a:cs typeface="Montserrat"/>
+                <a:sym typeface="Montserrat"/>
+              </a:rPr>
+              <a:t>CLIVAP</a:t>
+            </a:r>
+          </a:p>
+          <a:p>
+            <a:pPr marL="0" indent="0" algn="l" rtl="0">
+              <a:lnSpc>
+                <a:spcPct val="100000"/>
+              </a:lnSpc>
+              <a:spcBef>
+                <a:spcPts val="0"/>
+              </a:spcBef>
+              <a:spcAft>
+                <a:spcPts val="60"/>
+              </a:spcAft>
+              <a:buNone/>
+            </a:pPr>
+            <a:r>
+              <a:rPr lang="en-GB" sz="950" b="0" i="0">
+                <a:solidFill>
+                  <a:srgbClr val="595959"/>
+                </a:solidFill>
+                <a:latin typeface="Roboto"/>
+                <a:ea typeface="Roboto"/>
+                <a:cs typeface="Roboto"/>
+                <a:sym typeface="Roboto"/>
+              </a:rPr>
+              <a:t>6 opportunities · 270 variables</a:t>
+            </a:r>
+          </a:p>
+          <a:p>
+            <a:pPr marL="0" indent="0" algn="l" rtl="0">
+              <a:lnSpc>
+                <a:spcPct val="100000"/>
+              </a:lnSpc>
+              <a:spcBef>
+                <a:spcPts val="0"/>
+              </a:spcBef>
+              <a:spcAft>
+                <a:spcPts val="0"/>
+              </a:spcAft>
+              <a:buNone/>
+            </a:pPr>
+            <a:r>
+              <a:rPr lang="en-GB" sz="950" b="0" i="0">
+                <a:solidFill>
+                  <a:srgbClr val="ED7D31"/>
+                </a:solidFill>
+                <a:latin typeface="Roboto"/>
+                <a:ea typeface="Roboto"/>
+                <a:cs typeface="Roboto"/>
+                <a:sym typeface="Roboto"/>
+              </a:rPr>
+              <a:t>95 new CMIP7 variables</a:t>
+            </a:r>
+          </a:p>
+        </p:txBody>
+      </p:sp>
+      <p:sp>
+        <p:nvSpPr>
+          <p:cNvPr id="919" name="rc920"/>
+          <p:cNvSpPr/>
+          <p:nvPr/>
+        </p:nvSpPr>
+        <p:spPr>
+          <a:xfrm>
+            <a:off x="6190488" y="5029200"/>
+            <a:ext cx="2505456" cy="841248"/>
+          </a:xfrm>
+          <a:prstGeom prst="roundRect">
+            <a:avLst>
+              <a:gd name="adj" fmla="val 8695"/>
+            </a:avLst>
+          </a:prstGeom>
+          <a:solidFill>
+            <a:srgbClr val="F1F4F9"/>
+          </a:solidFill>
+          <a:ln>
+            <a:noFill/>
+          </a:ln>
+        </p:spPr>
+        <p:txBody>
+          <a:bodyPr/>
+          <a:lstStyle/>
+          <a:p>
+            <a:pPr algn="l" rtl="0">
+              <a:buNone/>
+            </a:pPr>
+          </a:p>
+        </p:txBody>
+      </p:sp>
+      <p:sp>
+        <p:nvSpPr>
+          <p:cNvPr id="921" name="tb922"/>
+          <p:cNvSpPr txBox="1"/>
+          <p:nvPr/>
+        </p:nvSpPr>
+        <p:spPr>
+          <a:xfrm>
+            <a:off x="6245352" y="5084064"/>
+            <a:ext cx="2395728" cy="768096"/>
+          </a:xfrm>
+          <a:prstGeom prst="rect">
+            <a:avLst/>
+          </a:prstGeom>
+          <a:noFill/>
+          <a:ln>
+            <a:noFill/>
+          </a:ln>
+        </p:spPr>
+        <p:txBody>
+          <a:bodyPr spcFirstLastPara="1" wrap="square" lIns="109728" tIns="109728" rIns="109728" bIns="109728" anchor="t" anchorCtr="0">
+            <a:noAutofit/>
+          </a:bodyPr>
+          <a:lstStyle/>
+          <a:p>
+            <a:pPr marL="0" indent="0" algn="l" rtl="0">
+              <a:lnSpc>
+                <a:spcPct val="100000"/>
+              </a:lnSpc>
+              <a:spcBef>
+                <a:spcPts val="0"/>
+              </a:spcBef>
+              <a:spcAft>
+                <a:spcPts val="180"/>
+              </a:spcAft>
+              <a:buNone/>
+            </a:pPr>
+            <a:r>
+              <a:rPr lang="en-GB" sz="1250" b="1" i="0">
+                <a:solidFill>
+                  <a:srgbClr val="1F3864"/>
+                </a:solidFill>
+                <a:latin typeface="Montserrat"/>
+                <a:ea typeface="Montserrat"/>
+                <a:cs typeface="Montserrat"/>
+                <a:sym typeface="Montserrat"/>
+              </a:rPr>
+              <a:t>ICR</a:t>
+            </a:r>
+          </a:p>
+          <a:p>
+            <a:pPr marL="0" indent="0" algn="l" rtl="0">
+              <a:lnSpc>
+                <a:spcPct val="100000"/>
+              </a:lnSpc>
+              <a:spcBef>
+                <a:spcPts val="0"/>
+              </a:spcBef>
+              <a:spcAft>
+                <a:spcPts val="60"/>
+              </a:spcAft>
+              <a:buNone/>
+            </a:pPr>
+            <a:r>
+              <a:rPr lang="en-GB" sz="950" b="0" i="0">
+                <a:solidFill>
+                  <a:srgbClr val="595959"/>
+                </a:solidFill>
+                <a:latin typeface="Roboto"/>
+                <a:ea typeface="Roboto"/>
+                <a:cs typeface="Roboto"/>
+                <a:sym typeface="Roboto"/>
+              </a:rPr>
+              <a:t>10 opportunities · 146 variables</a:t>
+            </a:r>
+          </a:p>
+          <a:p>
+            <a:pPr marL="0" indent="0" algn="l" rtl="0">
+              <a:lnSpc>
+                <a:spcPct val="100000"/>
+              </a:lnSpc>
+              <a:spcBef>
+                <a:spcPts val="0"/>
+              </a:spcBef>
+              <a:spcAft>
+                <a:spcPts val="0"/>
+              </a:spcAft>
+              <a:buNone/>
+            </a:pPr>
+            <a:r>
+              <a:rPr lang="en-GB" sz="950" b="0" i="0">
+                <a:solidFill>
+                  <a:srgbClr val="ED7D31"/>
+                </a:solidFill>
+                <a:latin typeface="Roboto"/>
+                <a:ea typeface="Roboto"/>
+                <a:cs typeface="Roboto"/>
+                <a:sym typeface="Roboto"/>
+              </a:rPr>
+              <a:t>53 new CMIP7 variables</a:t>
+            </a:r>
+          </a:p>
+        </p:txBody>
+      </p:sp>
+      <p:sp>
+        <p:nvSpPr>
+          <p:cNvPr id="923" name="rc924"/>
+          <p:cNvSpPr/>
+          <p:nvPr/>
+        </p:nvSpPr>
+        <p:spPr>
+          <a:xfrm>
+            <a:off x="8897112" y="5029200"/>
+            <a:ext cx="2505456" cy="841248"/>
+          </a:xfrm>
+          <a:prstGeom prst="roundRect">
+            <a:avLst>
+              <a:gd name="adj" fmla="val 8695"/>
+            </a:avLst>
+          </a:prstGeom>
+          <a:solidFill>
+            <a:srgbClr val="F1F4F9"/>
+          </a:solidFill>
+          <a:ln>
+            <a:noFill/>
+          </a:ln>
+        </p:spPr>
+        <p:txBody>
+          <a:bodyPr/>
+          <a:lstStyle/>
+          <a:p>
+            <a:pPr algn="l" rtl="0">
+              <a:buNone/>
+            </a:pPr>
+          </a:p>
+        </p:txBody>
+      </p:sp>
+      <p:sp>
+        <p:nvSpPr>
+          <p:cNvPr id="925" name="tb926"/>
+          <p:cNvSpPr txBox="1"/>
+          <p:nvPr/>
+        </p:nvSpPr>
+        <p:spPr>
+          <a:xfrm>
+            <a:off x="8951976" y="5084064"/>
+            <a:ext cx="2395728" cy="768096"/>
+          </a:xfrm>
+          <a:prstGeom prst="rect">
+            <a:avLst/>
+          </a:prstGeom>
+          <a:noFill/>
+          <a:ln>
+            <a:noFill/>
+          </a:ln>
+        </p:spPr>
+        <p:txBody>
+          <a:bodyPr spcFirstLastPara="1" wrap="square" lIns="109728" tIns="109728" rIns="109728" bIns="109728" anchor="t" anchorCtr="0">
+            <a:noAutofit/>
+          </a:bodyPr>
+          <a:lstStyle/>
+          <a:p>
+            <a:pPr marL="0" indent="0" algn="l" rtl="0">
+              <a:lnSpc>
+                <a:spcPct val="100000"/>
+              </a:lnSpc>
+              <a:spcBef>
+                <a:spcPts val="0"/>
+              </a:spcBef>
+              <a:spcAft>
+                <a:spcPts val="180"/>
+              </a:spcAft>
+              <a:buNone/>
+            </a:pPr>
+            <a:r>
+              <a:rPr lang="en-GB" sz="1250" b="1" i="0">
+                <a:solidFill>
+                  <a:srgbClr val="1F3864"/>
+                </a:solidFill>
+                <a:latin typeface="Montserrat"/>
+                <a:ea typeface="Montserrat"/>
+                <a:cs typeface="Montserrat"/>
+                <a:sym typeface="Montserrat"/>
+              </a:rPr>
+              <a:t>EIEE</a:t>
+            </a:r>
+          </a:p>
+          <a:p>
+            <a:pPr marL="0" indent="0" algn="l" rtl="0">
+              <a:lnSpc>
+                <a:spcPct val="100000"/>
+              </a:lnSpc>
+              <a:spcBef>
+                <a:spcPts val="0"/>
+              </a:spcBef>
+              <a:spcAft>
+                <a:spcPts val="60"/>
+              </a:spcAft>
+              <a:buNone/>
+            </a:pPr>
+            <a:r>
+              <a:rPr lang="en-GB" sz="950" b="0" i="0">
+                <a:solidFill>
+                  <a:srgbClr val="595959"/>
+                </a:solidFill>
+                <a:latin typeface="Roboto"/>
+                <a:ea typeface="Roboto"/>
+                <a:cs typeface="Roboto"/>
+                <a:sym typeface="Roboto"/>
+              </a:rPr>
+              <a:t>2 opportunities · 33 variables</a:t>
+            </a:r>
+          </a:p>
+          <a:p>
+            <a:pPr marL="0" indent="0" algn="l" rtl="0">
+              <a:lnSpc>
+                <a:spcPct val="100000"/>
+              </a:lnSpc>
+              <a:spcBef>
+                <a:spcPts val="0"/>
+              </a:spcBef>
+              <a:spcAft>
+                <a:spcPts val="0"/>
+              </a:spcAft>
+              <a:buNone/>
+            </a:pPr>
+            <a:r>
+              <a:rPr lang="en-GB" sz="950" b="0" i="0">
+                <a:solidFill>
+                  <a:srgbClr val="ED7D31"/>
+                </a:solidFill>
+                <a:latin typeface="Roboto"/>
+                <a:ea typeface="Roboto"/>
+                <a:cs typeface="Roboto"/>
+                <a:sym typeface="Roboto"/>
+              </a:rPr>
+              <a:t>14 new CMIP7 variables</a:t>
+            </a:r>
+          </a:p>
+        </p:txBody>
+      </p:sp>
+      <p:sp>
+        <p:nvSpPr>
+          <p:cNvPr id="927" name="tb928"/>
+          <p:cNvSpPr txBox="1"/>
+          <p:nvPr/>
+        </p:nvSpPr>
+        <p:spPr>
+          <a:xfrm>
+            <a:off x="777240" y="6053328"/>
+            <a:ext cx="10634472" cy="777240"/>
+          </a:xfrm>
+          <a:prstGeom prst="rect">
+            <a:avLst/>
+          </a:prstGeom>
+          <a:noFill/>
+          <a:ln>
+            <a:noFill/>
+          </a:ln>
+        </p:spPr>
+        <p:txBody>
+          <a:bodyPr spcFirstLastPara="1" wrap="square" lIns="0" tIns="0" rIns="0" bIns="0" anchor="t" anchorCtr="0">
+            <a:noAutofit/>
+          </a:bodyPr>
+          <a:lstStyle/>
+          <a:p>
+            <a:pPr marL="0" indent="0" algn="l" rtl="0">
+              <a:lnSpc>
+                <a:spcPct val="110000"/>
+              </a:lnSpc>
+              <a:spcBef>
+                <a:spcPts val="0"/>
+              </a:spcBef>
+              <a:spcAft>
+                <a:spcPts val="100"/>
+              </a:spcAft>
+              <a:buNone/>
+            </a:pPr>
+            <a:r>
+              <a:rPr lang="en-GB" sz="1000" b="0" i="0">
+                <a:solidFill>
+                  <a:srgbClr val="595959"/>
+                </a:solidFill>
+                <a:latin typeface="Roboto"/>
+                <a:ea typeface="Roboto"/>
+                <a:cs typeface="Roboto"/>
+                <a:sym typeface="Roboto"/>
+              </a:rPr>
+              <a:t>Four hydrology and land opportunities are shared between ESYDA and ICR. Every variable group of every opportunity above is expanded in full — no per-variable filtering — which is what produces the 853 requested variables on the next slide.</a:t>
+            </a:r>
+          </a:p>
+        </p:txBody>
+      </p:sp>
     </p:spTree>
   </p:cSld>
   <p:clrMapOvr>
